--- a/tunjunying/tunjunying_plan_v2.pptx
+++ b/tunjunying/tunjunying_plan_v2.pptx
@@ -1,40 +1,40 @@
 
 <file path=ppt/presentation.xml><?xml version="1.0" encoding="utf-8"?>
-<p:presentation xmlns:a="http://schemas.openxmlformats.org/drawingml/2006/main" xmlns:r="http://schemas.openxmlformats.org/officeDocument/2006/relationships" xmlns:p="http://schemas.openxmlformats.org/presentationml/2006/main" saveSubsetFonts="1" autoCompressPictures="0">
+<p:presentation xmlns:a="http://schemas.openxmlformats.org/drawingml/2006/main" xmlns:r="http://schemas.openxmlformats.org/officeDocument/2006/relationships" xmlns:p="http://schemas.openxmlformats.org/presentationml/2006/main" autoCompressPictures="0">
   <p:sldMasterIdLst>
     <p:sldMasterId id="2147483648" r:id="rId1"/>
   </p:sldMasterIdLst>
   <p:sldIdLst>
-    <p:sldId id="256" r:id="rId7"/>
-    <p:sldId id="257" r:id="rId8"/>
-    <p:sldId id="258" r:id="rId9"/>
-    <p:sldId id="259" r:id="rId10"/>
-    <p:sldId id="260" r:id="rId11"/>
-    <p:sldId id="261" r:id="rId12"/>
-    <p:sldId id="262" r:id="rId13"/>
-    <p:sldId id="263" r:id="rId14"/>
-    <p:sldId id="264" r:id="rId15"/>
-    <p:sldId id="265" r:id="rId16"/>
-    <p:sldId id="266" r:id="rId17"/>
-    <p:sldId id="267" r:id="rId18"/>
-    <p:sldId id="268" r:id="rId19"/>
-    <p:sldId id="269" r:id="rId20"/>
-    <p:sldId id="270" r:id="rId21"/>
-    <p:sldId id="271" r:id="rId22"/>
-    <p:sldId id="272" r:id="rId23"/>
-    <p:sldId id="273" r:id="rId24"/>
-    <p:sldId id="274" r:id="rId25"/>
-    <p:sldId id="275" r:id="rId26"/>
-    <p:sldId id="276" r:id="rId27"/>
-    <p:sldId id="277" r:id="rId28"/>
-    <p:sldId id="278" r:id="rId29"/>
-    <p:sldId id="279" r:id="rId30"/>
-    <p:sldId id="280" r:id="rId31"/>
-    <p:sldId id="281" r:id="rId32"/>
-    <p:sldId id="282" r:id="rId33"/>
-    <p:sldId id="283" r:id="rId34"/>
+    <p:sldId id="256" r:id="rId3"/>
+    <p:sldId id="257" r:id="rId4"/>
+    <p:sldId id="258" r:id="rId5"/>
+    <p:sldId id="259" r:id="rId6"/>
+    <p:sldId id="260" r:id="rId7"/>
+    <p:sldId id="261" r:id="rId8"/>
+    <p:sldId id="262" r:id="rId9"/>
+    <p:sldId id="263" r:id="rId10"/>
+    <p:sldId id="264" r:id="rId11"/>
+    <p:sldId id="265" r:id="rId12"/>
+    <p:sldId id="266" r:id="rId13"/>
+    <p:sldId id="267" r:id="rId14"/>
+    <p:sldId id="268" r:id="rId15"/>
+    <p:sldId id="269" r:id="rId16"/>
+    <p:sldId id="270" r:id="rId17"/>
+    <p:sldId id="271" r:id="rId18"/>
+    <p:sldId id="272" r:id="rId19"/>
+    <p:sldId id="273" r:id="rId20"/>
+    <p:sldId id="274" r:id="rId21"/>
+    <p:sldId id="275" r:id="rId22"/>
+    <p:sldId id="276" r:id="rId23"/>
+    <p:sldId id="277" r:id="rId24"/>
+    <p:sldId id="278" r:id="rId25"/>
+    <p:sldId id="279" r:id="rId26"/>
+    <p:sldId id="280" r:id="rId27"/>
+    <p:sldId id="281" r:id="rId28"/>
+    <p:sldId id="282" r:id="rId29"/>
+    <p:sldId id="283" r:id="rId30"/>
   </p:sldIdLst>
-  <p:sldSz cx="12191695" cy="6858000" type="screen4x3"/>
+  <p:sldSz cx="12191365" cy="6858000" type="screen4x3"/>
   <p:notesSz cx="6858000" cy="9144000"/>
   <p:defaultTextStyle>
     <a:defPPr>
@@ -131,6 +131,22 @@
       </a:defRPr>
     </a:lvl9pPr>
   </p:defaultTextStyle>
+  <p:extLst>
+    <p:ext uri="{EFAFB233-063F-42B5-8137-9DF3F51BA10A}">
+      <p15:sldGuideLst xmlns:p15="http://schemas.microsoft.com/office/powerpoint/2012/main">
+        <p15:guide id="1" orient="horz" pos="2160" userDrawn="1">
+          <p15:clr>
+            <a:srgbClr val="A4A3A4"/>
+          </p15:clr>
+        </p15:guide>
+        <p15:guide id="2" pos="2880" userDrawn="1">
+          <p15:clr>
+            <a:srgbClr val="A4A3A4"/>
+          </p15:clr>
+        </p15:guide>
+      </p15:sldGuideLst>
+    </p:ext>
+  </p:extLst>
 </p:presentation>
 </file>
 
@@ -315,7 +331,6 @@
           <a:p>
             <a:fld id="{5BCAD085-E8A6-8845-BD4E-CB4CCA059FC4}" type="datetimeFigureOut">
               <a:rPr lang="en-US" smtClean="0"/>
-              <a:t>1/27/13</a:t>
             </a:fld>
             <a:endParaRPr lang="en-US"/>
           </a:p>
@@ -357,18 +372,12 @@
           <a:p>
             <a:fld id="{C1FF6DA9-008F-8B48-92A6-B652298478BF}" type="slidenum">
               <a:rPr lang="en-US" smtClean="0"/>
-              <a:t>‹#›</a:t>
             </a:fld>
             <a:endParaRPr lang="en-US"/>
           </a:p>
         </p:txBody>
       </p:sp>
     </p:spTree>
-    <p:extLst>
-      <p:ext uri="{BB962C8B-B14F-4D97-AF65-F5344CB8AC3E}">
-        <p14:creationId xmlns:p14="http://schemas.microsoft.com/office/powerpoint/2010/main" val="3168075583"/>
-      </p:ext>
-    </p:extLst>
   </p:cSld>
   <p:clrMapOvr>
     <a:masterClrMapping/>
@@ -436,6 +445,7 @@
               <a:rPr lang="en-US" smtClean="0"/>
               <a:t>Click to edit Master text styles</a:t>
             </a:r>
+            <a:endParaRPr lang="en-US" smtClean="0"/>
           </a:p>
           <a:p>
             <a:pPr lvl="1"/>
@@ -443,6 +453,7 @@
               <a:rPr lang="en-US" smtClean="0"/>
               <a:t>Second level</a:t>
             </a:r>
+            <a:endParaRPr lang="en-US" smtClean="0"/>
           </a:p>
           <a:p>
             <a:pPr lvl="2"/>
@@ -450,6 +461,7 @@
               <a:rPr lang="en-US" smtClean="0"/>
               <a:t>Third level</a:t>
             </a:r>
+            <a:endParaRPr lang="en-US" smtClean="0"/>
           </a:p>
           <a:p>
             <a:pPr lvl="3"/>
@@ -457,6 +469,7 @@
               <a:rPr lang="en-US" smtClean="0"/>
               <a:t>Fourth level</a:t>
             </a:r>
+            <a:endParaRPr lang="en-US" smtClean="0"/>
           </a:p>
           <a:p>
             <a:pPr lvl="4"/>
@@ -485,7 +498,6 @@
           <a:p>
             <a:fld id="{5BCAD085-E8A6-8845-BD4E-CB4CCA059FC4}" type="datetimeFigureOut">
               <a:rPr lang="en-US" smtClean="0"/>
-              <a:t>1/27/13</a:t>
             </a:fld>
             <a:endParaRPr lang="en-US"/>
           </a:p>
@@ -527,18 +539,12 @@
           <a:p>
             <a:fld id="{C1FF6DA9-008F-8B48-92A6-B652298478BF}" type="slidenum">
               <a:rPr lang="en-US" smtClean="0"/>
-              <a:t>‹#›</a:t>
             </a:fld>
             <a:endParaRPr lang="en-US"/>
           </a:p>
         </p:txBody>
       </p:sp>
     </p:spTree>
-    <p:extLst>
-      <p:ext uri="{BB962C8B-B14F-4D97-AF65-F5344CB8AC3E}">
-        <p14:creationId xmlns:p14="http://schemas.microsoft.com/office/powerpoint/2010/main" val="2910927964"/>
-      </p:ext>
-    </p:extLst>
   </p:cSld>
   <p:clrMapOvr>
     <a:masterClrMapping/>
@@ -616,6 +622,7 @@
               <a:rPr lang="en-US" smtClean="0"/>
               <a:t>Click to edit Master text styles</a:t>
             </a:r>
+            <a:endParaRPr lang="en-US" smtClean="0"/>
           </a:p>
           <a:p>
             <a:pPr lvl="1"/>
@@ -623,6 +630,7 @@
               <a:rPr lang="en-US" smtClean="0"/>
               <a:t>Second level</a:t>
             </a:r>
+            <a:endParaRPr lang="en-US" smtClean="0"/>
           </a:p>
           <a:p>
             <a:pPr lvl="2"/>
@@ -630,6 +638,7 @@
               <a:rPr lang="en-US" smtClean="0"/>
               <a:t>Third level</a:t>
             </a:r>
+            <a:endParaRPr lang="en-US" smtClean="0"/>
           </a:p>
           <a:p>
             <a:pPr lvl="3"/>
@@ -637,6 +646,7 @@
               <a:rPr lang="en-US" smtClean="0"/>
               <a:t>Fourth level</a:t>
             </a:r>
+            <a:endParaRPr lang="en-US" smtClean="0"/>
           </a:p>
           <a:p>
             <a:pPr lvl="4"/>
@@ -665,7 +675,6 @@
           <a:p>
             <a:fld id="{5BCAD085-E8A6-8845-BD4E-CB4CCA059FC4}" type="datetimeFigureOut">
               <a:rPr lang="en-US" smtClean="0"/>
-              <a:t>1/27/13</a:t>
             </a:fld>
             <a:endParaRPr lang="en-US"/>
           </a:p>
@@ -707,18 +716,12 @@
           <a:p>
             <a:fld id="{C1FF6DA9-008F-8B48-92A6-B652298478BF}" type="slidenum">
               <a:rPr lang="en-US" smtClean="0"/>
-              <a:t>‹#›</a:t>
             </a:fld>
             <a:endParaRPr lang="en-US"/>
           </a:p>
         </p:txBody>
       </p:sp>
     </p:spTree>
-    <p:extLst>
-      <p:ext uri="{BB962C8B-B14F-4D97-AF65-F5344CB8AC3E}">
-        <p14:creationId xmlns:p14="http://schemas.microsoft.com/office/powerpoint/2010/main" val="3612223792"/>
-      </p:ext>
-    </p:extLst>
   </p:cSld>
   <p:clrMapOvr>
     <a:masterClrMapping/>
@@ -786,6 +789,7 @@
               <a:rPr lang="en-US" smtClean="0"/>
               <a:t>Click to edit Master text styles</a:t>
             </a:r>
+            <a:endParaRPr lang="en-US" smtClean="0"/>
           </a:p>
           <a:p>
             <a:pPr lvl="1"/>
@@ -793,6 +797,7 @@
               <a:rPr lang="en-US" smtClean="0"/>
               <a:t>Second level</a:t>
             </a:r>
+            <a:endParaRPr lang="en-US" smtClean="0"/>
           </a:p>
           <a:p>
             <a:pPr lvl="2"/>
@@ -800,6 +805,7 @@
               <a:rPr lang="en-US" smtClean="0"/>
               <a:t>Third level</a:t>
             </a:r>
+            <a:endParaRPr lang="en-US" smtClean="0"/>
           </a:p>
           <a:p>
             <a:pPr lvl="3"/>
@@ -807,6 +813,7 @@
               <a:rPr lang="en-US" smtClean="0"/>
               <a:t>Fourth level</a:t>
             </a:r>
+            <a:endParaRPr lang="en-US" smtClean="0"/>
           </a:p>
           <a:p>
             <a:pPr lvl="4"/>
@@ -835,7 +842,6 @@
           <a:p>
             <a:fld id="{5BCAD085-E8A6-8845-BD4E-CB4CCA059FC4}" type="datetimeFigureOut">
               <a:rPr lang="en-US" smtClean="0"/>
-              <a:t>1/27/13</a:t>
             </a:fld>
             <a:endParaRPr lang="en-US"/>
           </a:p>
@@ -877,18 +883,12 @@
           <a:p>
             <a:fld id="{C1FF6DA9-008F-8B48-92A6-B652298478BF}" type="slidenum">
               <a:rPr lang="en-US" smtClean="0"/>
-              <a:t>‹#›</a:t>
             </a:fld>
             <a:endParaRPr lang="en-US"/>
           </a:p>
         </p:txBody>
       </p:sp>
     </p:spTree>
-    <p:extLst>
-      <p:ext uri="{BB962C8B-B14F-4D97-AF65-F5344CB8AC3E}">
-        <p14:creationId xmlns:p14="http://schemas.microsoft.com/office/powerpoint/2010/main" val="2614314258"/>
-      </p:ext>
-    </p:extLst>
   </p:cSld>
   <p:clrMapOvr>
     <a:masterClrMapping/>
@@ -1061,6 +1061,7 @@
               <a:rPr lang="en-US" smtClean="0"/>
               <a:t>Click to edit Master text styles</a:t>
             </a:r>
+            <a:endParaRPr lang="en-US" smtClean="0"/>
           </a:p>
         </p:txBody>
       </p:sp>
@@ -1081,7 +1082,6 @@
           <a:p>
             <a:fld id="{5BCAD085-E8A6-8845-BD4E-CB4CCA059FC4}" type="datetimeFigureOut">
               <a:rPr lang="en-US" smtClean="0"/>
-              <a:t>1/27/13</a:t>
             </a:fld>
             <a:endParaRPr lang="en-US"/>
           </a:p>
@@ -1123,18 +1123,12 @@
           <a:p>
             <a:fld id="{C1FF6DA9-008F-8B48-92A6-B652298478BF}" type="slidenum">
               <a:rPr lang="en-US" smtClean="0"/>
-              <a:t>‹#›</a:t>
             </a:fld>
             <a:endParaRPr lang="en-US"/>
           </a:p>
         </p:txBody>
       </p:sp>
     </p:spTree>
-    <p:extLst>
-      <p:ext uri="{BB962C8B-B14F-4D97-AF65-F5344CB8AC3E}">
-        <p14:creationId xmlns:p14="http://schemas.microsoft.com/office/powerpoint/2010/main" val="960648375"/>
-      </p:ext>
-    </p:extLst>
   </p:cSld>
   <p:clrMapOvr>
     <a:masterClrMapping/>
@@ -1235,6 +1229,7 @@
               <a:rPr lang="en-US" smtClean="0"/>
               <a:t>Click to edit Master text styles</a:t>
             </a:r>
+            <a:endParaRPr lang="en-US" smtClean="0"/>
           </a:p>
           <a:p>
             <a:pPr lvl="1"/>
@@ -1242,6 +1237,7 @@
               <a:rPr lang="en-US" smtClean="0"/>
               <a:t>Second level</a:t>
             </a:r>
+            <a:endParaRPr lang="en-US" smtClean="0"/>
           </a:p>
           <a:p>
             <a:pPr lvl="2"/>
@@ -1249,6 +1245,7 @@
               <a:rPr lang="en-US" smtClean="0"/>
               <a:t>Third level</a:t>
             </a:r>
+            <a:endParaRPr lang="en-US" smtClean="0"/>
           </a:p>
           <a:p>
             <a:pPr lvl="3"/>
@@ -1256,6 +1253,7 @@
               <a:rPr lang="en-US" smtClean="0"/>
               <a:t>Fourth level</a:t>
             </a:r>
+            <a:endParaRPr lang="en-US" smtClean="0"/>
           </a:p>
           <a:p>
             <a:pPr lvl="4"/>
@@ -1320,6 +1318,7 @@
               <a:rPr lang="en-US" smtClean="0"/>
               <a:t>Click to edit Master text styles</a:t>
             </a:r>
+            <a:endParaRPr lang="en-US" smtClean="0"/>
           </a:p>
           <a:p>
             <a:pPr lvl="1"/>
@@ -1327,6 +1326,7 @@
               <a:rPr lang="en-US" smtClean="0"/>
               <a:t>Second level</a:t>
             </a:r>
+            <a:endParaRPr lang="en-US" smtClean="0"/>
           </a:p>
           <a:p>
             <a:pPr lvl="2"/>
@@ -1334,6 +1334,7 @@
               <a:rPr lang="en-US" smtClean="0"/>
               <a:t>Third level</a:t>
             </a:r>
+            <a:endParaRPr lang="en-US" smtClean="0"/>
           </a:p>
           <a:p>
             <a:pPr lvl="3"/>
@@ -1341,6 +1342,7 @@
               <a:rPr lang="en-US" smtClean="0"/>
               <a:t>Fourth level</a:t>
             </a:r>
+            <a:endParaRPr lang="en-US" smtClean="0"/>
           </a:p>
           <a:p>
             <a:pPr lvl="4"/>
@@ -1369,7 +1371,6 @@
           <a:p>
             <a:fld id="{5BCAD085-E8A6-8845-BD4E-CB4CCA059FC4}" type="datetimeFigureOut">
               <a:rPr lang="en-US" smtClean="0"/>
-              <a:t>1/27/13</a:t>
             </a:fld>
             <a:endParaRPr lang="en-US"/>
           </a:p>
@@ -1411,18 +1412,12 @@
           <a:p>
             <a:fld id="{C1FF6DA9-008F-8B48-92A6-B652298478BF}" type="slidenum">
               <a:rPr lang="en-US" smtClean="0"/>
-              <a:t>‹#›</a:t>
             </a:fld>
             <a:endParaRPr lang="en-US"/>
           </a:p>
         </p:txBody>
       </p:sp>
     </p:spTree>
-    <p:extLst>
-      <p:ext uri="{BB962C8B-B14F-4D97-AF65-F5344CB8AC3E}">
-        <p14:creationId xmlns:p14="http://schemas.microsoft.com/office/powerpoint/2010/main" val="2782244947"/>
-      </p:ext>
-    </p:extLst>
   </p:cSld>
   <p:clrMapOvr>
     <a:masterClrMapping/>
@@ -1536,6 +1531,7 @@
               <a:rPr lang="en-US" smtClean="0"/>
               <a:t>Click to edit Master text styles</a:t>
             </a:r>
+            <a:endParaRPr lang="en-US" smtClean="0"/>
           </a:p>
         </p:txBody>
       </p:sp>
@@ -1592,6 +1588,7 @@
               <a:rPr lang="en-US" smtClean="0"/>
               <a:t>Click to edit Master text styles</a:t>
             </a:r>
+            <a:endParaRPr lang="en-US" smtClean="0"/>
           </a:p>
           <a:p>
             <a:pPr lvl="1"/>
@@ -1599,6 +1596,7 @@
               <a:rPr lang="en-US" smtClean="0"/>
               <a:t>Second level</a:t>
             </a:r>
+            <a:endParaRPr lang="en-US" smtClean="0"/>
           </a:p>
           <a:p>
             <a:pPr lvl="2"/>
@@ -1606,6 +1604,7 @@
               <a:rPr lang="en-US" smtClean="0"/>
               <a:t>Third level</a:t>
             </a:r>
+            <a:endParaRPr lang="en-US" smtClean="0"/>
           </a:p>
           <a:p>
             <a:pPr lvl="3"/>
@@ -1613,6 +1612,7 @@
               <a:rPr lang="en-US" smtClean="0"/>
               <a:t>Fourth level</a:t>
             </a:r>
+            <a:endParaRPr lang="en-US" smtClean="0"/>
           </a:p>
           <a:p>
             <a:pPr lvl="4"/>
@@ -1686,6 +1686,7 @@
               <a:rPr lang="en-US" smtClean="0"/>
               <a:t>Click to edit Master text styles</a:t>
             </a:r>
+            <a:endParaRPr lang="en-US" smtClean="0"/>
           </a:p>
         </p:txBody>
       </p:sp>
@@ -1742,6 +1743,7 @@
               <a:rPr lang="en-US" smtClean="0"/>
               <a:t>Click to edit Master text styles</a:t>
             </a:r>
+            <a:endParaRPr lang="en-US" smtClean="0"/>
           </a:p>
           <a:p>
             <a:pPr lvl="1"/>
@@ -1749,6 +1751,7 @@
               <a:rPr lang="en-US" smtClean="0"/>
               <a:t>Second level</a:t>
             </a:r>
+            <a:endParaRPr lang="en-US" smtClean="0"/>
           </a:p>
           <a:p>
             <a:pPr lvl="2"/>
@@ -1756,6 +1759,7 @@
               <a:rPr lang="en-US" smtClean="0"/>
               <a:t>Third level</a:t>
             </a:r>
+            <a:endParaRPr lang="en-US" smtClean="0"/>
           </a:p>
           <a:p>
             <a:pPr lvl="3"/>
@@ -1763,6 +1767,7 @@
               <a:rPr lang="en-US" smtClean="0"/>
               <a:t>Fourth level</a:t>
             </a:r>
+            <a:endParaRPr lang="en-US" smtClean="0"/>
           </a:p>
           <a:p>
             <a:pPr lvl="4"/>
@@ -1791,7 +1796,6 @@
           <a:p>
             <a:fld id="{5BCAD085-E8A6-8845-BD4E-CB4CCA059FC4}" type="datetimeFigureOut">
               <a:rPr lang="en-US" smtClean="0"/>
-              <a:t>1/27/13</a:t>
             </a:fld>
             <a:endParaRPr lang="en-US"/>
           </a:p>
@@ -1833,18 +1837,12 @@
           <a:p>
             <a:fld id="{C1FF6DA9-008F-8B48-92A6-B652298478BF}" type="slidenum">
               <a:rPr lang="en-US" smtClean="0"/>
-              <a:t>‹#›</a:t>
             </a:fld>
             <a:endParaRPr lang="en-US"/>
           </a:p>
         </p:txBody>
       </p:sp>
     </p:spTree>
-    <p:extLst>
-      <p:ext uri="{BB962C8B-B14F-4D97-AF65-F5344CB8AC3E}">
-        <p14:creationId xmlns:p14="http://schemas.microsoft.com/office/powerpoint/2010/main" val="990158736"/>
-      </p:ext>
-    </p:extLst>
   </p:cSld>
   <p:clrMapOvr>
     <a:masterClrMapping/>
@@ -1909,7 +1907,6 @@
           <a:p>
             <a:fld id="{5BCAD085-E8A6-8845-BD4E-CB4CCA059FC4}" type="datetimeFigureOut">
               <a:rPr lang="en-US" smtClean="0"/>
-              <a:t>1/27/13</a:t>
             </a:fld>
             <a:endParaRPr lang="en-US"/>
           </a:p>
@@ -1951,18 +1948,12 @@
           <a:p>
             <a:fld id="{C1FF6DA9-008F-8B48-92A6-B652298478BF}" type="slidenum">
               <a:rPr lang="en-US" smtClean="0"/>
-              <a:t>‹#›</a:t>
             </a:fld>
             <a:endParaRPr lang="en-US"/>
           </a:p>
         </p:txBody>
       </p:sp>
     </p:spTree>
-    <p:extLst>
-      <p:ext uri="{BB962C8B-B14F-4D97-AF65-F5344CB8AC3E}">
-        <p14:creationId xmlns:p14="http://schemas.microsoft.com/office/powerpoint/2010/main" val="727027711"/>
-      </p:ext>
-    </p:extLst>
   </p:cSld>
   <p:clrMapOvr>
     <a:masterClrMapping/>
@@ -2004,7 +1995,6 @@
           <a:p>
             <a:fld id="{5BCAD085-E8A6-8845-BD4E-CB4CCA059FC4}" type="datetimeFigureOut">
               <a:rPr lang="en-US" smtClean="0"/>
-              <a:t>1/27/13</a:t>
             </a:fld>
             <a:endParaRPr lang="en-US"/>
           </a:p>
@@ -2046,18 +2036,12 @@
           <a:p>
             <a:fld id="{C1FF6DA9-008F-8B48-92A6-B652298478BF}" type="slidenum">
               <a:rPr lang="en-US" smtClean="0"/>
-              <a:t>‹#›</a:t>
             </a:fld>
             <a:endParaRPr lang="en-US"/>
           </a:p>
         </p:txBody>
       </p:sp>
     </p:spTree>
-    <p:extLst>
-      <p:ext uri="{BB962C8B-B14F-4D97-AF65-F5344CB8AC3E}">
-        <p14:creationId xmlns:p14="http://schemas.microsoft.com/office/powerpoint/2010/main" val="1212999818"/>
-      </p:ext>
-    </p:extLst>
   </p:cSld>
   <p:clrMapOvr>
     <a:masterClrMapping/>
@@ -2167,6 +2151,7 @@
               <a:rPr lang="en-US" smtClean="0"/>
               <a:t>Click to edit Master text styles</a:t>
             </a:r>
+            <a:endParaRPr lang="en-US" smtClean="0"/>
           </a:p>
           <a:p>
             <a:pPr lvl="1"/>
@@ -2174,6 +2159,7 @@
               <a:rPr lang="en-US" smtClean="0"/>
               <a:t>Second level</a:t>
             </a:r>
+            <a:endParaRPr lang="en-US" smtClean="0"/>
           </a:p>
           <a:p>
             <a:pPr lvl="2"/>
@@ -2181,6 +2167,7 @@
               <a:rPr lang="en-US" smtClean="0"/>
               <a:t>Third level</a:t>
             </a:r>
+            <a:endParaRPr lang="en-US" smtClean="0"/>
           </a:p>
           <a:p>
             <a:pPr lvl="3"/>
@@ -2188,6 +2175,7 @@
               <a:rPr lang="en-US" smtClean="0"/>
               <a:t>Fourth level</a:t>
             </a:r>
+            <a:endParaRPr lang="en-US" smtClean="0"/>
           </a:p>
           <a:p>
             <a:pPr lvl="4"/>
@@ -2261,6 +2249,7 @@
               <a:rPr lang="en-US" smtClean="0"/>
               <a:t>Click to edit Master text styles</a:t>
             </a:r>
+            <a:endParaRPr lang="en-US" smtClean="0"/>
           </a:p>
         </p:txBody>
       </p:sp>
@@ -2281,7 +2270,6 @@
           <a:p>
             <a:fld id="{5BCAD085-E8A6-8845-BD4E-CB4CCA059FC4}" type="datetimeFigureOut">
               <a:rPr lang="en-US" smtClean="0"/>
-              <a:t>1/27/13</a:t>
             </a:fld>
             <a:endParaRPr lang="en-US"/>
           </a:p>
@@ -2323,18 +2311,12 @@
           <a:p>
             <a:fld id="{C1FF6DA9-008F-8B48-92A6-B652298478BF}" type="slidenum">
               <a:rPr lang="en-US" smtClean="0"/>
-              <a:t>‹#›</a:t>
             </a:fld>
             <a:endParaRPr lang="en-US"/>
           </a:p>
         </p:txBody>
       </p:sp>
     </p:spTree>
-    <p:extLst>
-      <p:ext uri="{BB962C8B-B14F-4D97-AF65-F5344CB8AC3E}">
-        <p14:creationId xmlns:p14="http://schemas.microsoft.com/office/powerpoint/2010/main" val="1840726560"/>
-      </p:ext>
-    </p:extLst>
   </p:cSld>
   <p:clrMapOvr>
     <a:masterClrMapping/>
@@ -2514,6 +2496,7 @@
               <a:rPr lang="en-US" smtClean="0"/>
               <a:t>Click to edit Master text styles</a:t>
             </a:r>
+            <a:endParaRPr lang="en-US" smtClean="0"/>
           </a:p>
         </p:txBody>
       </p:sp>
@@ -2534,7 +2517,6 @@
           <a:p>
             <a:fld id="{5BCAD085-E8A6-8845-BD4E-CB4CCA059FC4}" type="datetimeFigureOut">
               <a:rPr lang="en-US" smtClean="0"/>
-              <a:t>1/27/13</a:t>
             </a:fld>
             <a:endParaRPr lang="en-US"/>
           </a:p>
@@ -2576,18 +2558,12 @@
           <a:p>
             <a:fld id="{C1FF6DA9-008F-8B48-92A6-B652298478BF}" type="slidenum">
               <a:rPr lang="en-US" smtClean="0"/>
-              <a:t>‹#›</a:t>
             </a:fld>
             <a:endParaRPr lang="en-US"/>
           </a:p>
         </p:txBody>
       </p:sp>
     </p:spTree>
-    <p:extLst>
-      <p:ext uri="{BB962C8B-B14F-4D97-AF65-F5344CB8AC3E}">
-        <p14:creationId xmlns:p14="http://schemas.microsoft.com/office/powerpoint/2010/main" val="3889236939"/>
-      </p:ext>
-    </p:extLst>
   </p:cSld>
   <p:clrMapOvr>
     <a:masterClrMapping/>
@@ -2680,6 +2656,7 @@
               <a:rPr lang="en-US" smtClean="0"/>
               <a:t>Click to edit Master text styles</a:t>
             </a:r>
+            <a:endParaRPr lang="en-US" smtClean="0"/>
           </a:p>
           <a:p>
             <a:pPr lvl="1"/>
@@ -2687,6 +2664,7 @@
               <a:rPr lang="en-US" smtClean="0"/>
               <a:t>Second level</a:t>
             </a:r>
+            <a:endParaRPr lang="en-US" smtClean="0"/>
           </a:p>
           <a:p>
             <a:pPr lvl="2"/>
@@ -2694,6 +2672,7 @@
               <a:rPr lang="en-US" smtClean="0"/>
               <a:t>Third level</a:t>
             </a:r>
+            <a:endParaRPr lang="en-US" smtClean="0"/>
           </a:p>
           <a:p>
             <a:pPr lvl="3"/>
@@ -2701,6 +2680,7 @@
               <a:rPr lang="en-US" smtClean="0"/>
               <a:t>Fourth level</a:t>
             </a:r>
+            <a:endParaRPr lang="en-US" smtClean="0"/>
           </a:p>
           <a:p>
             <a:pPr lvl="4"/>
@@ -2747,7 +2727,6 @@
           <a:p>
             <a:fld id="{5BCAD085-E8A6-8845-BD4E-CB4CCA059FC4}" type="datetimeFigureOut">
               <a:rPr lang="en-US" smtClean="0"/>
-              <a:t>1/27/13</a:t>
             </a:fld>
             <a:endParaRPr lang="en-US"/>
           </a:p>
@@ -2825,18 +2804,12 @@
           <a:p>
             <a:fld id="{C1FF6DA9-008F-8B48-92A6-B652298478BF}" type="slidenum">
               <a:rPr lang="en-US" smtClean="0"/>
-              <a:t>‹#›</a:t>
             </a:fld>
             <a:endParaRPr lang="en-US"/>
           </a:p>
         </p:txBody>
       </p:sp>
     </p:spTree>
-    <p:extLst>
-      <p:ext uri="{BB962C8B-B14F-4D97-AF65-F5344CB8AC3E}">
-        <p14:creationId xmlns:p14="http://schemas.microsoft.com/office/powerpoint/2010/main" val="2209977519"/>
-      </p:ext>
-    </p:extLst>
   </p:cSld>
   <p:clrMap bg1="lt1" tx1="dk1" bg2="lt2" tx2="dk2" accent1="accent1" accent2="accent2" accent3="accent3" accent4="accent4" accent5="accent5" accent6="accent6" hlink="hlink" folHlink="folHlink"/>
   <p:sldLayoutIdLst>
@@ -2874,7 +2847,7 @@
         <a:spcBef>
           <a:spcPct val="20000"/>
         </a:spcBef>
-        <a:buFont typeface="Arial"/>
+        <a:buFont typeface="Arial" panose="020B0604020202020204"/>
         <a:buChar char="•"/>
         <a:defRPr sz="3200" kern="1200">
           <a:solidFill>
@@ -2889,7 +2862,7 @@
         <a:spcBef>
           <a:spcPct val="20000"/>
         </a:spcBef>
-        <a:buFont typeface="Arial"/>
+        <a:buFont typeface="Arial" panose="020B0604020202020204"/>
         <a:buChar char="–"/>
         <a:defRPr sz="2800" kern="1200">
           <a:solidFill>
@@ -2904,7 +2877,7 @@
         <a:spcBef>
           <a:spcPct val="20000"/>
         </a:spcBef>
-        <a:buFont typeface="Arial"/>
+        <a:buFont typeface="Arial" panose="020B0604020202020204"/>
         <a:buChar char="•"/>
         <a:defRPr sz="2400" kern="1200">
           <a:solidFill>
@@ -2919,7 +2892,7 @@
         <a:spcBef>
           <a:spcPct val="20000"/>
         </a:spcBef>
-        <a:buFont typeface="Arial"/>
+        <a:buFont typeface="Arial" panose="020B0604020202020204"/>
         <a:buChar char="–"/>
         <a:defRPr sz="2000" kern="1200">
           <a:solidFill>
@@ -2934,7 +2907,7 @@
         <a:spcBef>
           <a:spcPct val="20000"/>
         </a:spcBef>
-        <a:buFont typeface="Arial"/>
+        <a:buFont typeface="Arial" panose="020B0604020202020204"/>
         <a:buChar char="»"/>
         <a:defRPr sz="2000" kern="1200">
           <a:solidFill>
@@ -2949,7 +2922,7 @@
         <a:spcBef>
           <a:spcPct val="20000"/>
         </a:spcBef>
-        <a:buFont typeface="Arial"/>
+        <a:buFont typeface="Arial" panose="020B0604020202020204"/>
         <a:buChar char="•"/>
         <a:defRPr sz="2000" kern="1200">
           <a:solidFill>
@@ -2964,7 +2937,7 @@
         <a:spcBef>
           <a:spcPct val="20000"/>
         </a:spcBef>
-        <a:buFont typeface="Arial"/>
+        <a:buFont typeface="Arial" panose="020B0604020202020204"/>
         <a:buChar char="•"/>
         <a:defRPr sz="2000" kern="1200">
           <a:solidFill>
@@ -2979,7 +2952,7 @@
         <a:spcBef>
           <a:spcPct val="20000"/>
         </a:spcBef>
-        <a:buFont typeface="Arial"/>
+        <a:buFont typeface="Arial" panose="020B0604020202020204"/>
         <a:buChar char="•"/>
         <a:defRPr sz="2000" kern="1200">
           <a:solidFill>
@@ -2994,7 +2967,7 @@
         <a:spcBef>
           <a:spcPct val="20000"/>
         </a:spcBef>
-        <a:buFont typeface="Arial"/>
+        <a:buFont typeface="Arial" panose="020B0604020202020204"/>
         <a:buChar char="•"/>
         <a:defRPr sz="2000" kern="1200">
           <a:solidFill>
@@ -3106,7 +3079,7 @@
 </file>
 
 <file path=ppt/slides/slide1.xml><?xml version="1.0" encoding="utf-8"?>
-<p:sld xmlns:a="http://schemas.openxmlformats.org/drawingml/2006/main" xmlns:p="http://schemas.openxmlformats.org/presentationml/2006/main" xmlns:r="http://schemas.openxmlformats.org/officeDocument/2006/relationships">
+<p:sld xmlns:a="http://schemas.openxmlformats.org/drawingml/2006/main" xmlns:r="http://schemas.openxmlformats.org/officeDocument/2006/relationships" xmlns:p="http://schemas.openxmlformats.org/presentationml/2006/main">
   <p:cSld>
     <p:bg>
       <p:bgPr>
@@ -3234,7 +3207,7 @@
                 <a:solidFill>
                   <a:srgbClr val="D4A017"/>
                 </a:solidFill>
-                <a:latin typeface="Arial"/>
+                <a:latin typeface="Arial" panose="020B0604020202020204"/>
               </a:defRPr>
             </a:pPr>
             <a:r>
@@ -3268,7 +3241,7 @@
                 <a:solidFill>
                   <a:srgbClr val="FFFFFF"/>
                 </a:solidFill>
-                <a:latin typeface="Arial"/>
+                <a:latin typeface="Arial" panose="020B0604020202020204"/>
               </a:defRPr>
             </a:pPr>
             <a:r>
@@ -3302,7 +3275,7 @@
                 <a:solidFill>
                   <a:srgbClr val="888888"/>
                 </a:solidFill>
-                <a:latin typeface="Arial"/>
+                <a:latin typeface="Arial" panose="020B0604020202020204"/>
               </a:defRPr>
             </a:pPr>
             <a:r>
@@ -3336,7 +3309,7 @@
                 <a:solidFill>
                   <a:srgbClr val="888888"/>
                 </a:solidFill>
-                <a:latin typeface="Arial"/>
+                <a:latin typeface="Arial" panose="020B0604020202020204"/>
               </a:defRPr>
             </a:pPr>
             <a:r>
@@ -3354,7 +3327,7 @@
 </file>
 
 <file path=ppt/slides/slide10.xml><?xml version="1.0" encoding="utf-8"?>
-<p:sld xmlns:a="http://schemas.openxmlformats.org/drawingml/2006/main" xmlns:p="http://schemas.openxmlformats.org/presentationml/2006/main" xmlns:r="http://schemas.openxmlformats.org/officeDocument/2006/relationships">
+<p:sld xmlns:a="http://schemas.openxmlformats.org/drawingml/2006/main" xmlns:r="http://schemas.openxmlformats.org/officeDocument/2006/relationships" xmlns:p="http://schemas.openxmlformats.org/presentationml/2006/main">
   <p:cSld>
     <p:bg>
       <p:bgPr>
@@ -3396,7 +3369,7 @@
                 <a:solidFill>
                   <a:srgbClr val="FFFFFF"/>
                 </a:solidFill>
-                <a:latin typeface="Arial"/>
+                <a:latin typeface="Arial" panose="020B0604020202020204"/>
               </a:defRPr>
             </a:pPr>
             <a:r>
@@ -3430,7 +3403,7 @@
                 <a:solidFill>
                   <a:srgbClr val="FFFFFF"/>
                 </a:solidFill>
-                <a:latin typeface="Arial"/>
+                <a:latin typeface="Arial" panose="020B0604020202020204"/>
               </a:defRPr>
             </a:pPr>
             <a:r>
@@ -3491,7 +3464,7 @@
 </file>
 
 <file path=ppt/slides/slide11.xml><?xml version="1.0" encoding="utf-8"?>
-<p:sld xmlns:a="http://schemas.openxmlformats.org/drawingml/2006/main" xmlns:p="http://schemas.openxmlformats.org/presentationml/2006/main" xmlns:r="http://schemas.openxmlformats.org/officeDocument/2006/relationships">
+<p:sld xmlns:a="http://schemas.openxmlformats.org/drawingml/2006/main" xmlns:r="http://schemas.openxmlformats.org/officeDocument/2006/relationships" xmlns:p="http://schemas.openxmlformats.org/presentationml/2006/main">
   <p:cSld>
     <p:bg>
       <p:bgPr>
@@ -3533,7 +3506,7 @@
                 <a:solidFill>
                   <a:srgbClr val="2D5016"/>
                 </a:solidFill>
-                <a:latin typeface="Arial"/>
+                <a:latin typeface="Arial" panose="020B0604020202020204"/>
               </a:defRPr>
             </a:pPr>
             <a:r>
@@ -3653,7 +3626,7 @@
                 <a:solidFill>
                   <a:srgbClr val="2D5016"/>
                 </a:solidFill>
-                <a:latin typeface="Arial"/>
+                <a:latin typeface="Arial" panose="020B0604020202020204"/>
               </a:defRPr>
             </a:pPr>
             <a:r>
@@ -3687,7 +3660,7 @@
                 <a:solidFill>
                   <a:srgbClr val="333333"/>
                 </a:solidFill>
-                <a:latin typeface="Arial"/>
+                <a:latin typeface="Arial" panose="020B0604020202020204"/>
               </a:defRPr>
             </a:pPr>
             <a:r>
@@ -3721,7 +3694,7 @@
                 <a:solidFill>
                   <a:srgbClr val="333333"/>
                 </a:solidFill>
-                <a:latin typeface="Arial"/>
+                <a:latin typeface="Arial" panose="020B0604020202020204"/>
               </a:defRPr>
             </a:pPr>
             <a:r>
@@ -3849,7 +3822,7 @@
                 <a:solidFill>
                   <a:srgbClr val="2D5016"/>
                 </a:solidFill>
-                <a:latin typeface="Arial"/>
+                <a:latin typeface="Arial" panose="020B0604020202020204"/>
               </a:defRPr>
             </a:pPr>
             <a:r>
@@ -3883,7 +3856,7 @@
                 <a:solidFill>
                   <a:srgbClr val="333333"/>
                 </a:solidFill>
-                <a:latin typeface="Arial"/>
+                <a:latin typeface="Arial" panose="020B0604020202020204"/>
               </a:defRPr>
             </a:pPr>
             <a:r>
@@ -3917,7 +3890,7 @@
                 <a:solidFill>
                   <a:srgbClr val="333333"/>
                 </a:solidFill>
-                <a:latin typeface="Arial"/>
+                <a:latin typeface="Arial" panose="020B0604020202020204"/>
               </a:defRPr>
             </a:pPr>
             <a:r>
@@ -4045,7 +4018,7 @@
                 <a:solidFill>
                   <a:srgbClr val="2D5016"/>
                 </a:solidFill>
-                <a:latin typeface="Arial"/>
+                <a:latin typeface="Arial" panose="020B0604020202020204"/>
               </a:defRPr>
             </a:pPr>
             <a:r>
@@ -4079,7 +4052,7 @@
                 <a:solidFill>
                   <a:srgbClr val="333333"/>
                 </a:solidFill>
-                <a:latin typeface="Arial"/>
+                <a:latin typeface="Arial" panose="020B0604020202020204"/>
               </a:defRPr>
             </a:pPr>
             <a:r>
@@ -4113,7 +4086,7 @@
                 <a:solidFill>
                   <a:srgbClr val="333333"/>
                 </a:solidFill>
-                <a:latin typeface="Arial"/>
+                <a:latin typeface="Arial" panose="020B0604020202020204"/>
               </a:defRPr>
             </a:pPr>
             <a:r>
@@ -4241,7 +4214,7 @@
                 <a:solidFill>
                   <a:srgbClr val="2D5016"/>
                 </a:solidFill>
-                <a:latin typeface="Arial"/>
+                <a:latin typeface="Arial" panose="020B0604020202020204"/>
               </a:defRPr>
             </a:pPr>
             <a:r>
@@ -4275,7 +4248,7 @@
                 <a:solidFill>
                   <a:srgbClr val="333333"/>
                 </a:solidFill>
-                <a:latin typeface="Arial"/>
+                <a:latin typeface="Arial" panose="020B0604020202020204"/>
               </a:defRPr>
             </a:pPr>
             <a:r>
@@ -4309,7 +4282,7 @@
                 <a:solidFill>
                   <a:srgbClr val="333333"/>
                 </a:solidFill>
-                <a:latin typeface="Arial"/>
+                <a:latin typeface="Arial" panose="020B0604020202020204"/>
               </a:defRPr>
             </a:pPr>
             <a:r>
@@ -4335,7 +4308,7 @@
 </file>
 
 <file path=ppt/slides/slide12.xml><?xml version="1.0" encoding="utf-8"?>
-<p:sld xmlns:a="http://schemas.openxmlformats.org/drawingml/2006/main" xmlns:p="http://schemas.openxmlformats.org/presentationml/2006/main" xmlns:r="http://schemas.openxmlformats.org/officeDocument/2006/relationships">
+<p:sld xmlns:a="http://schemas.openxmlformats.org/drawingml/2006/main" xmlns:r="http://schemas.openxmlformats.org/officeDocument/2006/relationships" xmlns:p="http://schemas.openxmlformats.org/presentationml/2006/main">
   <p:cSld>
     <p:bg>
       <p:bgPr>
@@ -4377,7 +4350,7 @@
                 <a:solidFill>
                   <a:srgbClr val="2D5016"/>
                 </a:solidFill>
-                <a:latin typeface="Arial"/>
+                <a:latin typeface="Arial" panose="020B0604020202020204"/>
               </a:defRPr>
             </a:pPr>
             <a:r>
@@ -4497,7 +4470,7 @@
                 <a:solidFill>
                   <a:srgbClr val="2D5016"/>
                 </a:solidFill>
-                <a:latin typeface="Arial"/>
+                <a:latin typeface="Arial" panose="020B0604020202020204"/>
               </a:defRPr>
             </a:pPr>
             <a:r>
@@ -4513,7 +4486,7 @@
                 <a:solidFill>
                   <a:srgbClr val="2D5016"/>
                 </a:solidFill>
-                <a:latin typeface="Arial"/>
+                <a:latin typeface="Arial" panose="020B0604020202020204"/>
               </a:defRPr>
             </a:pPr>
             <a:r>
@@ -4529,7 +4502,7 @@
                 <a:solidFill>
                   <a:srgbClr val="333333"/>
                 </a:solidFill>
-                <a:latin typeface="Arial"/>
+                <a:latin typeface="Arial" panose="020B0604020202020204"/>
               </a:defRPr>
             </a:pPr>
             <a:r>
@@ -4545,7 +4518,7 @@
                 <a:solidFill>
                   <a:srgbClr val="2D5016"/>
                 </a:solidFill>
-                <a:latin typeface="Arial"/>
+                <a:latin typeface="Arial" panose="020B0604020202020204"/>
               </a:defRPr>
             </a:pPr>
             <a:r>
@@ -4561,7 +4534,7 @@
                 <a:solidFill>
                   <a:srgbClr val="333333"/>
                 </a:solidFill>
-                <a:latin typeface="Arial"/>
+                <a:latin typeface="Arial" panose="020B0604020202020204"/>
               </a:defRPr>
             </a:pPr>
             <a:r>
@@ -4577,7 +4550,7 @@
                 <a:solidFill>
                   <a:srgbClr val="2D5016"/>
                 </a:solidFill>
-                <a:latin typeface="Arial"/>
+                <a:latin typeface="Arial" panose="020B0604020202020204"/>
               </a:defRPr>
             </a:pPr>
             <a:r>
@@ -4593,7 +4566,7 @@
                 <a:solidFill>
                   <a:srgbClr val="333333"/>
                 </a:solidFill>
-                <a:latin typeface="Arial"/>
+                <a:latin typeface="Arial" panose="020B0604020202020204"/>
               </a:defRPr>
             </a:pPr>
             <a:r>
@@ -4609,7 +4582,7 @@
                 <a:solidFill>
                   <a:srgbClr val="2D5016"/>
                 </a:solidFill>
-                <a:latin typeface="Arial"/>
+                <a:latin typeface="Arial" panose="020B0604020202020204"/>
               </a:defRPr>
             </a:pPr>
             <a:r>
@@ -4625,7 +4598,7 @@
                 <a:solidFill>
                   <a:srgbClr val="333333"/>
                 </a:solidFill>
-                <a:latin typeface="Arial"/>
+                <a:latin typeface="Arial" panose="020B0604020202020204"/>
               </a:defRPr>
             </a:pPr>
             <a:r>
@@ -4745,7 +4718,7 @@
                 <a:solidFill>
                   <a:srgbClr val="2D5016"/>
                 </a:solidFill>
-                <a:latin typeface="Arial"/>
+                <a:latin typeface="Arial" panose="020B0604020202020204"/>
               </a:defRPr>
             </a:pPr>
             <a:r>
@@ -4761,7 +4734,7 @@
                 <a:solidFill>
                   <a:srgbClr val="333333"/>
                 </a:solidFill>
-                <a:latin typeface="Arial"/>
+                <a:latin typeface="Arial" panose="020B0604020202020204"/>
               </a:defRPr>
             </a:pPr>
             <a:r>
@@ -4777,7 +4750,7 @@
                 <a:solidFill>
                   <a:srgbClr val="333333"/>
                 </a:solidFill>
-                <a:latin typeface="Arial"/>
+                <a:latin typeface="Arial" panose="020B0604020202020204"/>
               </a:defRPr>
             </a:pPr>
             <a:r>
@@ -4793,7 +4766,7 @@
                 <a:solidFill>
                   <a:srgbClr val="333333"/>
                 </a:solidFill>
-                <a:latin typeface="Arial"/>
+                <a:latin typeface="Arial" panose="020B0604020202020204"/>
               </a:defRPr>
             </a:pPr>
             <a:r>
@@ -4809,7 +4782,7 @@
                 <a:solidFill>
                   <a:srgbClr val="333333"/>
                 </a:solidFill>
-                <a:latin typeface="Arial"/>
+                <a:latin typeface="Arial" panose="020B0604020202020204"/>
               </a:defRPr>
             </a:pPr>
             <a:r>
@@ -4825,7 +4798,7 @@
                 <a:solidFill>
                   <a:srgbClr val="333333"/>
                 </a:solidFill>
-                <a:latin typeface="Arial"/>
+                <a:latin typeface="Arial" panose="020B0604020202020204"/>
               </a:defRPr>
             </a:pPr>
             <a:r>
@@ -4841,7 +4814,7 @@
                 <a:solidFill>
                   <a:srgbClr val="333333"/>
                 </a:solidFill>
-                <a:latin typeface="Arial"/>
+                <a:latin typeface="Arial" panose="020B0604020202020204"/>
               </a:defRPr>
             </a:pPr>
             <a:r>
@@ -4857,7 +4830,7 @@
                 <a:solidFill>
                   <a:srgbClr val="333333"/>
                 </a:solidFill>
-                <a:latin typeface="Arial"/>
+                <a:latin typeface="Arial" panose="020B0604020202020204"/>
               </a:defRPr>
             </a:pPr>
             <a:r>
@@ -4875,7 +4848,7 @@
 </file>
 
 <file path=ppt/slides/slide13.xml><?xml version="1.0" encoding="utf-8"?>
-<p:sld xmlns:a="http://schemas.openxmlformats.org/drawingml/2006/main" xmlns:p="http://schemas.openxmlformats.org/presentationml/2006/main" xmlns:r="http://schemas.openxmlformats.org/officeDocument/2006/relationships">
+<p:sld xmlns:a="http://schemas.openxmlformats.org/drawingml/2006/main" xmlns:r="http://schemas.openxmlformats.org/officeDocument/2006/relationships" xmlns:p="http://schemas.openxmlformats.org/presentationml/2006/main">
   <p:cSld>
     <p:bg>
       <p:bgPr>
@@ -4917,7 +4890,7 @@
                 <a:solidFill>
                   <a:srgbClr val="FFFFFF"/>
                 </a:solidFill>
-                <a:latin typeface="Arial"/>
+                <a:latin typeface="Arial" panose="020B0604020202020204"/>
               </a:defRPr>
             </a:pPr>
             <a:r>
@@ -4951,7 +4924,7 @@
                 <a:solidFill>
                   <a:srgbClr val="FFFFFF"/>
                 </a:solidFill>
-                <a:latin typeface="Arial"/>
+                <a:latin typeface="Arial" panose="020B0604020202020204"/>
               </a:defRPr>
             </a:pPr>
             <a:r>
@@ -5012,7 +4985,7 @@
 </file>
 
 <file path=ppt/slides/slide14.xml><?xml version="1.0" encoding="utf-8"?>
-<p:sld xmlns:a="http://schemas.openxmlformats.org/drawingml/2006/main" xmlns:p="http://schemas.openxmlformats.org/presentationml/2006/main" xmlns:r="http://schemas.openxmlformats.org/officeDocument/2006/relationships">
+<p:sld xmlns:a="http://schemas.openxmlformats.org/drawingml/2006/main" xmlns:r="http://schemas.openxmlformats.org/officeDocument/2006/relationships" xmlns:p="http://schemas.openxmlformats.org/presentationml/2006/main">
   <p:cSld>
     <p:bg>
       <p:bgPr>
@@ -5054,7 +5027,7 @@
                 <a:solidFill>
                   <a:srgbClr val="2D5016"/>
                 </a:solidFill>
-                <a:latin typeface="Arial"/>
+                <a:latin typeface="Arial" panose="020B0604020202020204"/>
               </a:defRPr>
             </a:pPr>
             <a:r>
@@ -5174,7 +5147,7 @@
                 <a:solidFill>
                   <a:srgbClr val="2D5016"/>
                 </a:solidFill>
-                <a:latin typeface="Arial"/>
+                <a:latin typeface="Arial" panose="020B0604020202020204"/>
               </a:defRPr>
             </a:pPr>
             <a:r>
@@ -5208,7 +5181,7 @@
                 <a:solidFill>
                   <a:srgbClr val="333333"/>
                 </a:solidFill>
-                <a:latin typeface="Arial"/>
+                <a:latin typeface="Arial" panose="020B0604020202020204"/>
               </a:defRPr>
             </a:pPr>
             <a:r>
@@ -5250,7 +5223,7 @@
                 <a:solidFill>
                   <a:srgbClr val="888888"/>
                 </a:solidFill>
-                <a:latin typeface="Arial"/>
+                <a:latin typeface="Arial" panose="020B0604020202020204"/>
               </a:defRPr>
             </a:pPr>
             <a:r>
@@ -5370,7 +5343,7 @@
                 <a:solidFill>
                   <a:srgbClr val="2D5016"/>
                 </a:solidFill>
-                <a:latin typeface="Arial"/>
+                <a:latin typeface="Arial" panose="020B0604020202020204"/>
               </a:defRPr>
             </a:pPr>
             <a:r>
@@ -5404,7 +5377,7 @@
                 <a:solidFill>
                   <a:srgbClr val="333333"/>
                 </a:solidFill>
-                <a:latin typeface="Arial"/>
+                <a:latin typeface="Arial" panose="020B0604020202020204"/>
               </a:defRPr>
             </a:pPr>
             <a:r>
@@ -5446,7 +5419,7 @@
                 <a:solidFill>
                   <a:srgbClr val="888888"/>
                 </a:solidFill>
-                <a:latin typeface="Arial"/>
+                <a:latin typeface="Arial" panose="020B0604020202020204"/>
               </a:defRPr>
             </a:pPr>
             <a:r>
@@ -5566,7 +5539,7 @@
                 <a:solidFill>
                   <a:srgbClr val="2D5016"/>
                 </a:solidFill>
-                <a:latin typeface="Arial"/>
+                <a:latin typeface="Arial" panose="020B0604020202020204"/>
               </a:defRPr>
             </a:pPr>
             <a:r>
@@ -5600,7 +5573,7 @@
                 <a:solidFill>
                   <a:srgbClr val="333333"/>
                 </a:solidFill>
-                <a:latin typeface="Arial"/>
+                <a:latin typeface="Arial" panose="020B0604020202020204"/>
               </a:defRPr>
             </a:pPr>
             <a:r>
@@ -5642,7 +5615,7 @@
                 <a:solidFill>
                   <a:srgbClr val="888888"/>
                 </a:solidFill>
-                <a:latin typeface="Arial"/>
+                <a:latin typeface="Arial" panose="020B0604020202020204"/>
               </a:defRPr>
             </a:pPr>
             <a:r>
@@ -5762,7 +5735,7 @@
                 <a:solidFill>
                   <a:srgbClr val="2D5016"/>
                 </a:solidFill>
-                <a:latin typeface="Arial"/>
+                <a:latin typeface="Arial" panose="020B0604020202020204"/>
               </a:defRPr>
             </a:pPr>
             <a:r>
@@ -5796,7 +5769,7 @@
                 <a:solidFill>
                   <a:srgbClr val="333333"/>
                 </a:solidFill>
-                <a:latin typeface="Arial"/>
+                <a:latin typeface="Arial" panose="020B0604020202020204"/>
               </a:defRPr>
             </a:pPr>
             <a:r>
@@ -5838,7 +5811,7 @@
                 <a:solidFill>
                   <a:srgbClr val="888888"/>
                 </a:solidFill>
-                <a:latin typeface="Arial"/>
+                <a:latin typeface="Arial" panose="020B0604020202020204"/>
               </a:defRPr>
             </a:pPr>
             <a:r>
@@ -5856,7 +5829,7 @@
 </file>
 
 <file path=ppt/slides/slide15.xml><?xml version="1.0" encoding="utf-8"?>
-<p:sld xmlns:a="http://schemas.openxmlformats.org/drawingml/2006/main" xmlns:p="http://schemas.openxmlformats.org/presentationml/2006/main" xmlns:r="http://schemas.openxmlformats.org/officeDocument/2006/relationships">
+<p:sld xmlns:a="http://schemas.openxmlformats.org/drawingml/2006/main" xmlns:r="http://schemas.openxmlformats.org/officeDocument/2006/relationships" xmlns:p="http://schemas.openxmlformats.org/presentationml/2006/main">
   <p:cSld>
     <p:bg>
       <p:bgPr>
@@ -5898,7 +5871,7 @@
                 <a:solidFill>
                   <a:srgbClr val="2D5016"/>
                 </a:solidFill>
-                <a:latin typeface="Arial"/>
+                <a:latin typeface="Arial" panose="020B0604020202020204"/>
               </a:defRPr>
             </a:pPr>
             <a:r>
@@ -6018,7 +5991,7 @@
                 <a:solidFill>
                   <a:srgbClr val="2D5016"/>
                 </a:solidFill>
-                <a:latin typeface="Arial"/>
+                <a:latin typeface="Arial" panose="020B0604020202020204"/>
               </a:defRPr>
             </a:pPr>
             <a:r>
@@ -6052,7 +6025,7 @@
                 <a:solidFill>
                   <a:srgbClr val="333333"/>
                 </a:solidFill>
-                <a:latin typeface="Arial"/>
+                <a:latin typeface="Arial" panose="020B0604020202020204"/>
               </a:defRPr>
             </a:pPr>
             <a:r>
@@ -6094,7 +6067,7 @@
                 <a:solidFill>
                   <a:srgbClr val="888888"/>
                 </a:solidFill>
-                <a:latin typeface="Arial"/>
+                <a:latin typeface="Arial" panose="020B0604020202020204"/>
               </a:defRPr>
             </a:pPr>
             <a:r>
@@ -6214,7 +6187,7 @@
                 <a:solidFill>
                   <a:srgbClr val="2D5016"/>
                 </a:solidFill>
-                <a:latin typeface="Arial"/>
+                <a:latin typeface="Arial" panose="020B0604020202020204"/>
               </a:defRPr>
             </a:pPr>
             <a:r>
@@ -6248,7 +6221,7 @@
                 <a:solidFill>
                   <a:srgbClr val="333333"/>
                 </a:solidFill>
-                <a:latin typeface="Arial"/>
+                <a:latin typeface="Arial" panose="020B0604020202020204"/>
               </a:defRPr>
             </a:pPr>
             <a:r>
@@ -6290,7 +6263,7 @@
                 <a:solidFill>
                   <a:srgbClr val="888888"/>
                 </a:solidFill>
-                <a:latin typeface="Arial"/>
+                <a:latin typeface="Arial" panose="020B0604020202020204"/>
               </a:defRPr>
             </a:pPr>
             <a:r>
@@ -6410,7 +6383,7 @@
                 <a:solidFill>
                   <a:srgbClr val="2D5016"/>
                 </a:solidFill>
-                <a:latin typeface="Arial"/>
+                <a:latin typeface="Arial" panose="020B0604020202020204"/>
               </a:defRPr>
             </a:pPr>
             <a:r>
@@ -6444,7 +6417,7 @@
                 <a:solidFill>
                   <a:srgbClr val="333333"/>
                 </a:solidFill>
-                <a:latin typeface="Arial"/>
+                <a:latin typeface="Arial" panose="020B0604020202020204"/>
               </a:defRPr>
             </a:pPr>
             <a:r>
@@ -6486,7 +6459,7 @@
                 <a:solidFill>
                   <a:srgbClr val="888888"/>
                 </a:solidFill>
-                <a:latin typeface="Arial"/>
+                <a:latin typeface="Arial" panose="020B0604020202020204"/>
               </a:defRPr>
             </a:pPr>
             <a:r>
@@ -6606,7 +6579,7 @@
                 <a:solidFill>
                   <a:srgbClr val="2D5016"/>
                 </a:solidFill>
-                <a:latin typeface="Arial"/>
+                <a:latin typeface="Arial" panose="020B0604020202020204"/>
               </a:defRPr>
             </a:pPr>
             <a:r>
@@ -6640,7 +6613,7 @@
                 <a:solidFill>
                   <a:srgbClr val="333333"/>
                 </a:solidFill>
-                <a:latin typeface="Arial"/>
+                <a:latin typeface="Arial" panose="020B0604020202020204"/>
               </a:defRPr>
             </a:pPr>
             <a:r>
@@ -6682,7 +6655,7 @@
                 <a:solidFill>
                   <a:srgbClr val="888888"/>
                 </a:solidFill>
-                <a:latin typeface="Arial"/>
+                <a:latin typeface="Arial" panose="020B0604020202020204"/>
               </a:defRPr>
             </a:pPr>
             <a:r>
@@ -6700,7 +6673,7 @@
 </file>
 
 <file path=ppt/slides/slide16.xml><?xml version="1.0" encoding="utf-8"?>
-<p:sld xmlns:a="http://schemas.openxmlformats.org/drawingml/2006/main" xmlns:p="http://schemas.openxmlformats.org/presentationml/2006/main" xmlns:r="http://schemas.openxmlformats.org/officeDocument/2006/relationships">
+<p:sld xmlns:a="http://schemas.openxmlformats.org/drawingml/2006/main" xmlns:r="http://schemas.openxmlformats.org/officeDocument/2006/relationships" xmlns:p="http://schemas.openxmlformats.org/presentationml/2006/main">
   <p:cSld>
     <p:bg>
       <p:bgPr>
@@ -6742,7 +6715,7 @@
                 <a:solidFill>
                   <a:srgbClr val="2D5016"/>
                 </a:solidFill>
-                <a:latin typeface="Arial"/>
+                <a:latin typeface="Arial" panose="020B0604020202020204"/>
               </a:defRPr>
             </a:pPr>
             <a:r>
@@ -6862,7 +6835,7 @@
                 <a:solidFill>
                   <a:srgbClr val="2D5016"/>
                 </a:solidFill>
-                <a:latin typeface="Arial"/>
+                <a:latin typeface="Arial" panose="020B0604020202020204"/>
               </a:defRPr>
             </a:pPr>
             <a:r>
@@ -6878,7 +6851,7 @@
                 <a:solidFill>
                   <a:srgbClr val="888888"/>
                 </a:solidFill>
-                <a:latin typeface="Arial"/>
+                <a:latin typeface="Arial" panose="020B0604020202020204"/>
               </a:defRPr>
             </a:pPr>
             <a:r>
@@ -6891,7 +6864,7 @@
                 <a:solidFill>
                   <a:srgbClr val="333333"/>
                 </a:solidFill>
-                <a:latin typeface="Arial"/>
+                <a:latin typeface="Arial" panose="020B0604020202020204"/>
               </a:defRPr>
             </a:pPr>
           </a:p>
@@ -6904,7 +6877,7 @@
                 <a:solidFill>
                   <a:srgbClr val="333333"/>
                 </a:solidFill>
-                <a:latin typeface="Arial"/>
+                <a:latin typeface="Arial" panose="020B0604020202020204"/>
               </a:defRPr>
             </a:pPr>
             <a:r>
@@ -6920,7 +6893,7 @@
                 <a:solidFill>
                   <a:srgbClr val="333333"/>
                 </a:solidFill>
-                <a:latin typeface="Arial"/>
+                <a:latin typeface="Arial" panose="020B0604020202020204"/>
               </a:defRPr>
             </a:pPr>
             <a:r>
@@ -6936,7 +6909,7 @@
                 <a:solidFill>
                   <a:srgbClr val="333333"/>
                 </a:solidFill>
-                <a:latin typeface="Arial"/>
+                <a:latin typeface="Arial" panose="020B0604020202020204"/>
               </a:defRPr>
             </a:pPr>
             <a:r>
@@ -6952,7 +6925,7 @@
                 <a:solidFill>
                   <a:srgbClr val="333333"/>
                 </a:solidFill>
-                <a:latin typeface="Arial"/>
+                <a:latin typeface="Arial" panose="020B0604020202020204"/>
               </a:defRPr>
             </a:pPr>
             <a:r>
@@ -6968,7 +6941,7 @@
                 <a:solidFill>
                   <a:srgbClr val="333333"/>
                 </a:solidFill>
-                <a:latin typeface="Arial"/>
+                <a:latin typeface="Arial" panose="020B0604020202020204"/>
               </a:defRPr>
             </a:pPr>
             <a:r>
@@ -6984,7 +6957,7 @@
                 <a:solidFill>
                   <a:srgbClr val="333333"/>
                 </a:solidFill>
-                <a:latin typeface="Arial"/>
+                <a:latin typeface="Arial" panose="020B0604020202020204"/>
               </a:defRPr>
             </a:pPr>
             <a:r>
@@ -7000,7 +6973,7 @@
                 <a:solidFill>
                   <a:srgbClr val="333333"/>
                 </a:solidFill>
-                <a:latin typeface="Arial"/>
+                <a:latin typeface="Arial" panose="020B0604020202020204"/>
               </a:defRPr>
             </a:pPr>
             <a:r>
@@ -7016,7 +6989,7 @@
                 <a:solidFill>
                   <a:srgbClr val="333333"/>
                 </a:solidFill>
-                <a:latin typeface="Arial"/>
+                <a:latin typeface="Arial" panose="020B0604020202020204"/>
               </a:defRPr>
             </a:pPr>
             <a:r>
@@ -7136,7 +7109,7 @@
                 <a:solidFill>
                   <a:srgbClr val="2D5016"/>
                 </a:solidFill>
-                <a:latin typeface="Arial"/>
+                <a:latin typeface="Arial" panose="020B0604020202020204"/>
               </a:defRPr>
             </a:pPr>
             <a:r>
@@ -7152,7 +7125,7 @@
                 <a:solidFill>
                   <a:srgbClr val="888888"/>
                 </a:solidFill>
-                <a:latin typeface="Arial"/>
+                <a:latin typeface="Arial" panose="020B0604020202020204"/>
               </a:defRPr>
             </a:pPr>
             <a:r>
@@ -7165,7 +7138,7 @@
                 <a:solidFill>
                   <a:srgbClr val="333333"/>
                 </a:solidFill>
-                <a:latin typeface="Arial"/>
+                <a:latin typeface="Arial" panose="020B0604020202020204"/>
               </a:defRPr>
             </a:pPr>
           </a:p>
@@ -7178,7 +7151,7 @@
                 <a:solidFill>
                   <a:srgbClr val="333333"/>
                 </a:solidFill>
-                <a:latin typeface="Arial"/>
+                <a:latin typeface="Arial" panose="020B0604020202020204"/>
               </a:defRPr>
             </a:pPr>
             <a:r>
@@ -7194,7 +7167,7 @@
                 <a:solidFill>
                   <a:srgbClr val="333333"/>
                 </a:solidFill>
-                <a:latin typeface="Arial"/>
+                <a:latin typeface="Arial" panose="020B0604020202020204"/>
               </a:defRPr>
             </a:pPr>
             <a:r>
@@ -7210,7 +7183,7 @@
                 <a:solidFill>
                   <a:srgbClr val="333333"/>
                 </a:solidFill>
-                <a:latin typeface="Arial"/>
+                <a:latin typeface="Arial" panose="020B0604020202020204"/>
               </a:defRPr>
             </a:pPr>
             <a:r>
@@ -7226,7 +7199,7 @@
                 <a:solidFill>
                   <a:srgbClr val="333333"/>
                 </a:solidFill>
-                <a:latin typeface="Arial"/>
+                <a:latin typeface="Arial" panose="020B0604020202020204"/>
               </a:defRPr>
             </a:pPr>
             <a:r>
@@ -7242,7 +7215,7 @@
                 <a:solidFill>
                   <a:srgbClr val="333333"/>
                 </a:solidFill>
-                <a:latin typeface="Arial"/>
+                <a:latin typeface="Arial" panose="020B0604020202020204"/>
               </a:defRPr>
             </a:pPr>
             <a:r>
@@ -7258,7 +7231,7 @@
                 <a:solidFill>
                   <a:srgbClr val="333333"/>
                 </a:solidFill>
-                <a:latin typeface="Arial"/>
+                <a:latin typeface="Arial" panose="020B0604020202020204"/>
               </a:defRPr>
             </a:pPr>
             <a:r>
@@ -7274,7 +7247,7 @@
                 <a:solidFill>
                   <a:srgbClr val="333333"/>
                 </a:solidFill>
-                <a:latin typeface="Arial"/>
+                <a:latin typeface="Arial" panose="020B0604020202020204"/>
               </a:defRPr>
             </a:pPr>
             <a:r>
@@ -7290,7 +7263,7 @@
                 <a:solidFill>
                   <a:srgbClr val="333333"/>
                 </a:solidFill>
-                <a:latin typeface="Arial"/>
+                <a:latin typeface="Arial" panose="020B0604020202020204"/>
               </a:defRPr>
             </a:pPr>
             <a:r>
@@ -7410,7 +7383,7 @@
                 <a:solidFill>
                   <a:srgbClr val="2D5016"/>
                 </a:solidFill>
-                <a:latin typeface="Arial"/>
+                <a:latin typeface="Arial" panose="020B0604020202020204"/>
               </a:defRPr>
             </a:pPr>
             <a:r>
@@ -7426,7 +7399,7 @@
                 <a:solidFill>
                   <a:srgbClr val="888888"/>
                 </a:solidFill>
-                <a:latin typeface="Arial"/>
+                <a:latin typeface="Arial" panose="020B0604020202020204"/>
               </a:defRPr>
             </a:pPr>
             <a:r>
@@ -7439,7 +7412,7 @@
                 <a:solidFill>
                   <a:srgbClr val="333333"/>
                 </a:solidFill>
-                <a:latin typeface="Arial"/>
+                <a:latin typeface="Arial" panose="020B0604020202020204"/>
               </a:defRPr>
             </a:pPr>
           </a:p>
@@ -7452,7 +7425,7 @@
                 <a:solidFill>
                   <a:srgbClr val="333333"/>
                 </a:solidFill>
-                <a:latin typeface="Arial"/>
+                <a:latin typeface="Arial" panose="020B0604020202020204"/>
               </a:defRPr>
             </a:pPr>
             <a:r>
@@ -7468,7 +7441,7 @@
                 <a:solidFill>
                   <a:srgbClr val="333333"/>
                 </a:solidFill>
-                <a:latin typeface="Arial"/>
+                <a:latin typeface="Arial" panose="020B0604020202020204"/>
               </a:defRPr>
             </a:pPr>
             <a:r>
@@ -7484,7 +7457,7 @@
                 <a:solidFill>
                   <a:srgbClr val="333333"/>
                 </a:solidFill>
-                <a:latin typeface="Arial"/>
+                <a:latin typeface="Arial" panose="020B0604020202020204"/>
               </a:defRPr>
             </a:pPr>
             <a:r>
@@ -7500,7 +7473,7 @@
                 <a:solidFill>
                   <a:srgbClr val="333333"/>
                 </a:solidFill>
-                <a:latin typeface="Arial"/>
+                <a:latin typeface="Arial" panose="020B0604020202020204"/>
               </a:defRPr>
             </a:pPr>
             <a:r>
@@ -7516,7 +7489,7 @@
                 <a:solidFill>
                   <a:srgbClr val="333333"/>
                 </a:solidFill>
-                <a:latin typeface="Arial"/>
+                <a:latin typeface="Arial" panose="020B0604020202020204"/>
               </a:defRPr>
             </a:pPr>
             <a:r>
@@ -7532,7 +7505,7 @@
                 <a:solidFill>
                   <a:srgbClr val="333333"/>
                 </a:solidFill>
-                <a:latin typeface="Arial"/>
+                <a:latin typeface="Arial" panose="020B0604020202020204"/>
               </a:defRPr>
             </a:pPr>
             <a:r>
@@ -7548,7 +7521,7 @@
                 <a:solidFill>
                   <a:srgbClr val="333333"/>
                 </a:solidFill>
-                <a:latin typeface="Arial"/>
+                <a:latin typeface="Arial" panose="020B0604020202020204"/>
               </a:defRPr>
             </a:pPr>
             <a:r>
@@ -7564,7 +7537,7 @@
                 <a:solidFill>
                   <a:srgbClr val="333333"/>
                 </a:solidFill>
-                <a:latin typeface="Arial"/>
+                <a:latin typeface="Arial" panose="020B0604020202020204"/>
               </a:defRPr>
             </a:pPr>
             <a:r>
@@ -7582,7 +7555,7 @@
 </file>
 
 <file path=ppt/slides/slide17.xml><?xml version="1.0" encoding="utf-8"?>
-<p:sld xmlns:a="http://schemas.openxmlformats.org/drawingml/2006/main" xmlns:p="http://schemas.openxmlformats.org/presentationml/2006/main" xmlns:r="http://schemas.openxmlformats.org/officeDocument/2006/relationships">
+<p:sld xmlns:a="http://schemas.openxmlformats.org/drawingml/2006/main" xmlns:r="http://schemas.openxmlformats.org/officeDocument/2006/relationships" xmlns:p="http://schemas.openxmlformats.org/presentationml/2006/main">
   <p:cSld>
     <p:bg>
       <p:bgPr>
@@ -7624,7 +7597,7 @@
                 <a:solidFill>
                   <a:srgbClr val="FFFFFF"/>
                 </a:solidFill>
-                <a:latin typeface="Arial"/>
+                <a:latin typeface="Arial" panose="020B0604020202020204"/>
               </a:defRPr>
             </a:pPr>
             <a:r>
@@ -7658,7 +7631,7 @@
                 <a:solidFill>
                   <a:srgbClr val="FFFFFF"/>
                 </a:solidFill>
-                <a:latin typeface="Arial"/>
+                <a:latin typeface="Arial" panose="020B0604020202020204"/>
               </a:defRPr>
             </a:pPr>
             <a:r>
@@ -7719,7 +7692,7 @@
 </file>
 
 <file path=ppt/slides/slide18.xml><?xml version="1.0" encoding="utf-8"?>
-<p:sld xmlns:a="http://schemas.openxmlformats.org/drawingml/2006/main" xmlns:p="http://schemas.openxmlformats.org/presentationml/2006/main" xmlns:r="http://schemas.openxmlformats.org/officeDocument/2006/relationships">
+<p:sld xmlns:a="http://schemas.openxmlformats.org/drawingml/2006/main" xmlns:r="http://schemas.openxmlformats.org/officeDocument/2006/relationships" xmlns:p="http://schemas.openxmlformats.org/presentationml/2006/main">
   <p:cSld>
     <p:bg>
       <p:bgPr>
@@ -7761,7 +7734,7 @@
                 <a:solidFill>
                   <a:srgbClr val="2D5016"/>
                 </a:solidFill>
-                <a:latin typeface="Arial"/>
+                <a:latin typeface="Arial" panose="020B0604020202020204"/>
               </a:defRPr>
             </a:pPr>
             <a:r>
@@ -7881,7 +7854,7 @@
                 <a:solidFill>
                   <a:srgbClr val="2D5016"/>
                 </a:solidFill>
-                <a:latin typeface="Arial"/>
+                <a:latin typeface="Arial" panose="020B0604020202020204"/>
               </a:defRPr>
             </a:pPr>
             <a:r>
@@ -7915,7 +7888,7 @@
                 <a:solidFill>
                   <a:srgbClr val="D4A017"/>
                 </a:solidFill>
-                <a:latin typeface="Arial"/>
+                <a:latin typeface="Arial" panose="020B0604020202020204"/>
               </a:defRPr>
             </a:pPr>
             <a:r>
@@ -7949,7 +7922,7 @@
                 <a:solidFill>
                   <a:srgbClr val="333333"/>
                 </a:solidFill>
-                <a:latin typeface="Arial"/>
+                <a:latin typeface="Arial" panose="020B0604020202020204"/>
               </a:defRPr>
             </a:pPr>
             <a:r>
@@ -7987,7 +7960,7 @@
                 <a:solidFill>
                   <a:srgbClr val="888888"/>
                 </a:solidFill>
-                <a:latin typeface="Arial"/>
+                <a:latin typeface="Arial" panose="020B0604020202020204"/>
               </a:defRPr>
             </a:pPr>
             <a:r>
@@ -8107,7 +8080,7 @@
                 <a:solidFill>
                   <a:srgbClr val="2D5016"/>
                 </a:solidFill>
-                <a:latin typeface="Arial"/>
+                <a:latin typeface="Arial" panose="020B0604020202020204"/>
               </a:defRPr>
             </a:pPr>
             <a:r>
@@ -8141,7 +8114,7 @@
                 <a:solidFill>
                   <a:srgbClr val="D4A017"/>
                 </a:solidFill>
-                <a:latin typeface="Arial"/>
+                <a:latin typeface="Arial" panose="020B0604020202020204"/>
               </a:defRPr>
             </a:pPr>
             <a:r>
@@ -8175,7 +8148,7 @@
                 <a:solidFill>
                   <a:srgbClr val="333333"/>
                 </a:solidFill>
-                <a:latin typeface="Arial"/>
+                <a:latin typeface="Arial" panose="020B0604020202020204"/>
               </a:defRPr>
             </a:pPr>
             <a:r>
@@ -8213,7 +8186,7 @@
                 <a:solidFill>
                   <a:srgbClr val="888888"/>
                 </a:solidFill>
-                <a:latin typeface="Arial"/>
+                <a:latin typeface="Arial" panose="020B0604020202020204"/>
               </a:defRPr>
             </a:pPr>
             <a:r>
@@ -8333,7 +8306,7 @@
                 <a:solidFill>
                   <a:srgbClr val="2D5016"/>
                 </a:solidFill>
-                <a:latin typeface="Arial"/>
+                <a:latin typeface="Arial" panose="020B0604020202020204"/>
               </a:defRPr>
             </a:pPr>
             <a:r>
@@ -8367,7 +8340,7 @@
                 <a:solidFill>
                   <a:srgbClr val="D4A017"/>
                 </a:solidFill>
-                <a:latin typeface="Arial"/>
+                <a:latin typeface="Arial" panose="020B0604020202020204"/>
               </a:defRPr>
             </a:pPr>
             <a:r>
@@ -8401,7 +8374,7 @@
                 <a:solidFill>
                   <a:srgbClr val="333333"/>
                 </a:solidFill>
-                <a:latin typeface="Arial"/>
+                <a:latin typeface="Arial" panose="020B0604020202020204"/>
               </a:defRPr>
             </a:pPr>
             <a:r>
@@ -8439,7 +8412,7 @@
                 <a:solidFill>
                   <a:srgbClr val="888888"/>
                 </a:solidFill>
-                <a:latin typeface="Arial"/>
+                <a:latin typeface="Arial" panose="020B0604020202020204"/>
               </a:defRPr>
             </a:pPr>
             <a:r>
@@ -8516,7 +8489,7 @@
                 <a:solidFill>
                   <a:srgbClr val="2D5016"/>
                 </a:solidFill>
-                <a:latin typeface="Arial"/>
+                <a:latin typeface="Arial" panose="020B0604020202020204"/>
               </a:defRPr>
             </a:pPr>
             <a:r>
@@ -8550,7 +8523,7 @@
                 <a:solidFill>
                   <a:srgbClr val="333333"/>
                 </a:solidFill>
-                <a:latin typeface="Arial"/>
+                <a:latin typeface="Arial" panose="020B0604020202020204"/>
               </a:defRPr>
             </a:pPr>
             <a:r>
@@ -8566,7 +8539,7 @@
                 <a:solidFill>
                   <a:srgbClr val="888888"/>
                 </a:solidFill>
-                <a:latin typeface="Arial"/>
+                <a:latin typeface="Arial" panose="020B0604020202020204"/>
               </a:defRPr>
             </a:pPr>
             <a:r>
@@ -8582,7 +8555,7 @@
                 <a:solidFill>
                   <a:srgbClr val="888888"/>
                 </a:solidFill>
-                <a:latin typeface="Arial"/>
+                <a:latin typeface="Arial" panose="020B0604020202020204"/>
               </a:defRPr>
             </a:pPr>
             <a:r>
@@ -8600,7 +8573,7 @@
 </file>
 
 <file path=ppt/slides/slide19.xml><?xml version="1.0" encoding="utf-8"?>
-<p:sld xmlns:a="http://schemas.openxmlformats.org/drawingml/2006/main" xmlns:p="http://schemas.openxmlformats.org/presentationml/2006/main" xmlns:r="http://schemas.openxmlformats.org/officeDocument/2006/relationships">
+<p:sld xmlns:a="http://schemas.openxmlformats.org/drawingml/2006/main" xmlns:r="http://schemas.openxmlformats.org/officeDocument/2006/relationships" xmlns:p="http://schemas.openxmlformats.org/presentationml/2006/main">
   <p:cSld>
     <p:bg>
       <p:bgPr>
@@ -8642,7 +8615,7 @@
                 <a:solidFill>
                   <a:srgbClr val="2D5016"/>
                 </a:solidFill>
-                <a:latin typeface="Arial"/>
+                <a:latin typeface="Arial" panose="020B0604020202020204"/>
               </a:defRPr>
             </a:pPr>
             <a:r>
@@ -8762,7 +8735,7 @@
                 <a:solidFill>
                   <a:srgbClr val="D4A017"/>
                 </a:solidFill>
-                <a:latin typeface="Arial"/>
+                <a:latin typeface="Arial" panose="020B0604020202020204"/>
               </a:defRPr>
             </a:pPr>
             <a:r>
@@ -8796,7 +8769,7 @@
                 <a:solidFill>
                   <a:srgbClr val="FFFFFF"/>
                 </a:solidFill>
-                <a:latin typeface="Arial"/>
+                <a:latin typeface="Arial" panose="020B0604020202020204"/>
               </a:defRPr>
             </a:pPr>
             <a:r>
@@ -8830,7 +8803,7 @@
                 <a:solidFill>
                   <a:srgbClr val="333333"/>
                 </a:solidFill>
-                <a:latin typeface="Arial"/>
+                <a:latin typeface="Arial" panose="020B0604020202020204"/>
               </a:defRPr>
             </a:pPr>
             <a:r>
@@ -8864,7 +8837,7 @@
                 <a:solidFill>
                   <a:srgbClr val="888888"/>
                 </a:solidFill>
-                <a:latin typeface="Arial"/>
+                <a:latin typeface="Arial" panose="020B0604020202020204"/>
               </a:defRPr>
             </a:pPr>
             <a:r>
@@ -8984,7 +8957,7 @@
                 <a:solidFill>
                   <a:srgbClr val="D4A017"/>
                 </a:solidFill>
-                <a:latin typeface="Arial"/>
+                <a:latin typeface="Arial" panose="020B0604020202020204"/>
               </a:defRPr>
             </a:pPr>
             <a:r>
@@ -9018,7 +8991,7 @@
                 <a:solidFill>
                   <a:srgbClr val="FFFFFF"/>
                 </a:solidFill>
-                <a:latin typeface="Arial"/>
+                <a:latin typeface="Arial" panose="020B0604020202020204"/>
               </a:defRPr>
             </a:pPr>
             <a:r>
@@ -9052,7 +9025,7 @@
                 <a:solidFill>
                   <a:srgbClr val="333333"/>
                 </a:solidFill>
-                <a:latin typeface="Arial"/>
+                <a:latin typeface="Arial" panose="020B0604020202020204"/>
               </a:defRPr>
             </a:pPr>
             <a:r>
@@ -9086,7 +9059,7 @@
                 <a:solidFill>
                   <a:srgbClr val="888888"/>
                 </a:solidFill>
-                <a:latin typeface="Arial"/>
+                <a:latin typeface="Arial" panose="020B0604020202020204"/>
               </a:defRPr>
             </a:pPr>
             <a:r>
@@ -9206,7 +9179,7 @@
                 <a:solidFill>
                   <a:srgbClr val="D4A017"/>
                 </a:solidFill>
-                <a:latin typeface="Arial"/>
+                <a:latin typeface="Arial" panose="020B0604020202020204"/>
               </a:defRPr>
             </a:pPr>
             <a:r>
@@ -9240,7 +9213,7 @@
                 <a:solidFill>
                   <a:srgbClr val="FFFFFF"/>
                 </a:solidFill>
-                <a:latin typeface="Arial"/>
+                <a:latin typeface="Arial" panose="020B0604020202020204"/>
               </a:defRPr>
             </a:pPr>
             <a:r>
@@ -9274,7 +9247,7 @@
                 <a:solidFill>
                   <a:srgbClr val="333333"/>
                 </a:solidFill>
-                <a:latin typeface="Arial"/>
+                <a:latin typeface="Arial" panose="020B0604020202020204"/>
               </a:defRPr>
             </a:pPr>
             <a:r>
@@ -9308,7 +9281,7 @@
                 <a:solidFill>
                   <a:srgbClr val="888888"/>
                 </a:solidFill>
-                <a:latin typeface="Arial"/>
+                <a:latin typeface="Arial" panose="020B0604020202020204"/>
               </a:defRPr>
             </a:pPr>
             <a:r>
@@ -9342,7 +9315,7 @@
                 <a:solidFill>
                   <a:srgbClr val="2D5016"/>
                 </a:solidFill>
-                <a:latin typeface="Arial"/>
+                <a:latin typeface="Arial" panose="020B0604020202020204"/>
               </a:defRPr>
             </a:pPr>
             <a:r>
@@ -9419,7 +9392,7 @@
                 <a:solidFill>
                   <a:srgbClr val="2D5016"/>
                 </a:solidFill>
-                <a:latin typeface="Arial"/>
+                <a:latin typeface="Arial" panose="020B0604020202020204"/>
               </a:defRPr>
             </a:pPr>
             <a:r>
@@ -9453,7 +9426,7 @@
                 <a:solidFill>
                   <a:srgbClr val="888888"/>
                 </a:solidFill>
-                <a:latin typeface="Arial"/>
+                <a:latin typeface="Arial" panose="020B0604020202020204"/>
               </a:defRPr>
             </a:pPr>
             <a:r>
@@ -9487,7 +9460,7 @@
                 <a:solidFill>
                   <a:srgbClr val="333333"/>
                 </a:solidFill>
-                <a:latin typeface="Arial"/>
+                <a:latin typeface="Arial" panose="020B0604020202020204"/>
               </a:defRPr>
             </a:pPr>
             <a:r>
@@ -9568,7 +9541,7 @@
                 <a:solidFill>
                   <a:srgbClr val="2D5016"/>
                 </a:solidFill>
-                <a:latin typeface="Arial"/>
+                <a:latin typeface="Arial" panose="020B0604020202020204"/>
               </a:defRPr>
             </a:pPr>
             <a:r>
@@ -9602,7 +9575,7 @@
                 <a:solidFill>
                   <a:srgbClr val="888888"/>
                 </a:solidFill>
-                <a:latin typeface="Arial"/>
+                <a:latin typeface="Arial" panose="020B0604020202020204"/>
               </a:defRPr>
             </a:pPr>
             <a:r>
@@ -9636,7 +9609,7 @@
                 <a:solidFill>
                   <a:srgbClr val="333333"/>
                 </a:solidFill>
-                <a:latin typeface="Arial"/>
+                <a:latin typeface="Arial" panose="020B0604020202020204"/>
               </a:defRPr>
             </a:pPr>
             <a:r>
@@ -9717,7 +9690,7 @@
                 <a:solidFill>
                   <a:srgbClr val="2D5016"/>
                 </a:solidFill>
-                <a:latin typeface="Arial"/>
+                <a:latin typeface="Arial" panose="020B0604020202020204"/>
               </a:defRPr>
             </a:pPr>
             <a:r>
@@ -9751,7 +9724,7 @@
                 <a:solidFill>
                   <a:srgbClr val="888888"/>
                 </a:solidFill>
-                <a:latin typeface="Arial"/>
+                <a:latin typeface="Arial" panose="020B0604020202020204"/>
               </a:defRPr>
             </a:pPr>
             <a:r>
@@ -9785,7 +9758,7 @@
                 <a:solidFill>
                   <a:srgbClr val="333333"/>
                 </a:solidFill>
-                <a:latin typeface="Arial"/>
+                <a:latin typeface="Arial" panose="020B0604020202020204"/>
               </a:defRPr>
             </a:pPr>
             <a:r>
@@ -9807,7 +9780,7 @@
 </file>
 
 <file path=ppt/slides/slide2.xml><?xml version="1.0" encoding="utf-8"?>
-<p:sld xmlns:a="http://schemas.openxmlformats.org/drawingml/2006/main" xmlns:p="http://schemas.openxmlformats.org/presentationml/2006/main" xmlns:r="http://schemas.openxmlformats.org/officeDocument/2006/relationships">
+<p:sld xmlns:a="http://schemas.openxmlformats.org/drawingml/2006/main" xmlns:r="http://schemas.openxmlformats.org/officeDocument/2006/relationships" xmlns:p="http://schemas.openxmlformats.org/presentationml/2006/main">
   <p:cSld>
     <p:bg>
       <p:bgPr>
@@ -9849,7 +9822,7 @@
                 <a:solidFill>
                   <a:srgbClr val="FFFFFF"/>
                 </a:solidFill>
-                <a:latin typeface="Arial"/>
+                <a:latin typeface="Arial" panose="020B0604020202020204"/>
               </a:defRPr>
             </a:pPr>
             <a:r>
@@ -9883,7 +9856,7 @@
                 <a:solidFill>
                   <a:srgbClr val="FFFFFF"/>
                 </a:solidFill>
-                <a:latin typeface="Arial"/>
+                <a:latin typeface="Arial" panose="020B0604020202020204"/>
               </a:defRPr>
             </a:pPr>
             <a:r>
@@ -9944,7 +9917,7 @@
 </file>
 
 <file path=ppt/slides/slide20.xml><?xml version="1.0" encoding="utf-8"?>
-<p:sld xmlns:a="http://schemas.openxmlformats.org/drawingml/2006/main" xmlns:p="http://schemas.openxmlformats.org/presentationml/2006/main" xmlns:r="http://schemas.openxmlformats.org/officeDocument/2006/relationships">
+<p:sld xmlns:a="http://schemas.openxmlformats.org/drawingml/2006/main" xmlns:r="http://schemas.openxmlformats.org/officeDocument/2006/relationships" xmlns:p="http://schemas.openxmlformats.org/presentationml/2006/main">
   <p:cSld>
     <p:bg>
       <p:bgPr>
@@ -9986,7 +9959,7 @@
                 <a:solidFill>
                   <a:srgbClr val="FFFFFF"/>
                 </a:solidFill>
-                <a:latin typeface="Arial"/>
+                <a:latin typeface="Arial" panose="020B0604020202020204"/>
               </a:defRPr>
             </a:pPr>
             <a:r>
@@ -10020,7 +9993,7 @@
                 <a:solidFill>
                   <a:srgbClr val="FFFFFF"/>
                 </a:solidFill>
-                <a:latin typeface="Arial"/>
+                <a:latin typeface="Arial" panose="020B0604020202020204"/>
               </a:defRPr>
             </a:pPr>
             <a:r>
@@ -10081,7 +10054,7 @@
 </file>
 
 <file path=ppt/slides/slide21.xml><?xml version="1.0" encoding="utf-8"?>
-<p:sld xmlns:a="http://schemas.openxmlformats.org/drawingml/2006/main" xmlns:p="http://schemas.openxmlformats.org/presentationml/2006/main" xmlns:r="http://schemas.openxmlformats.org/officeDocument/2006/relationships">
+<p:sld xmlns:a="http://schemas.openxmlformats.org/drawingml/2006/main" xmlns:r="http://schemas.openxmlformats.org/officeDocument/2006/relationships" xmlns:p="http://schemas.openxmlformats.org/presentationml/2006/main">
   <p:cSld>
     <p:bg>
       <p:bgPr>
@@ -10123,7 +10096,7 @@
                 <a:solidFill>
                   <a:srgbClr val="2D5016"/>
                 </a:solidFill>
-                <a:latin typeface="Arial"/>
+                <a:latin typeface="Arial" panose="020B0604020202020204"/>
               </a:defRPr>
             </a:pPr>
             <a:r>
@@ -10200,7 +10173,7 @@
                 <a:solidFill>
                   <a:srgbClr val="FFFFFF"/>
                 </a:solidFill>
-                <a:latin typeface="Arial"/>
+                <a:latin typeface="Arial" panose="020B0604020202020204"/>
               </a:defRPr>
             </a:pPr>
             <a:r>
@@ -10277,7 +10250,7 @@
                 <a:solidFill>
                   <a:srgbClr val="FFFFFF"/>
                 </a:solidFill>
-                <a:latin typeface="Arial"/>
+                <a:latin typeface="Arial" panose="020B0604020202020204"/>
               </a:defRPr>
             </a:pPr>
             <a:r>
@@ -10354,7 +10327,7 @@
                 <a:solidFill>
                   <a:srgbClr val="FFFFFF"/>
                 </a:solidFill>
-                <a:latin typeface="Arial"/>
+                <a:latin typeface="Arial" panose="020B0604020202020204"/>
               </a:defRPr>
             </a:pPr>
             <a:r>
@@ -10431,7 +10404,7 @@
                 <a:solidFill>
                   <a:srgbClr val="FFFFFF"/>
                 </a:solidFill>
-                <a:latin typeface="Arial"/>
+                <a:latin typeface="Arial" panose="020B0604020202020204"/>
               </a:defRPr>
             </a:pPr>
             <a:r>
@@ -10508,7 +10481,7 @@
                 <a:solidFill>
                   <a:srgbClr val="FFFFFF"/>
                 </a:solidFill>
-                <a:latin typeface="Arial"/>
+                <a:latin typeface="Arial" panose="020B0604020202020204"/>
               </a:defRPr>
             </a:pPr>
             <a:r>
@@ -10585,7 +10558,7 @@
                 <a:solidFill>
                   <a:srgbClr val="2D5016"/>
                 </a:solidFill>
-                <a:latin typeface="Arial"/>
+                <a:latin typeface="Arial" panose="020B0604020202020204"/>
               </a:defRPr>
             </a:pPr>
             <a:r>
@@ -10662,7 +10635,7 @@
                 <a:solidFill>
                   <a:srgbClr val="333333"/>
                 </a:solidFill>
-                <a:latin typeface="Arial"/>
+                <a:latin typeface="Arial" panose="020B0604020202020204"/>
               </a:defRPr>
             </a:pPr>
             <a:r>
@@ -10739,7 +10712,7 @@
                 <a:solidFill>
                   <a:srgbClr val="333333"/>
                 </a:solidFill>
-                <a:latin typeface="Arial"/>
+                <a:latin typeface="Arial" panose="020B0604020202020204"/>
               </a:defRPr>
             </a:pPr>
             <a:r>
@@ -10816,7 +10789,7 @@
                 <a:solidFill>
                   <a:srgbClr val="333333"/>
                 </a:solidFill>
-                <a:latin typeface="Arial"/>
+                <a:latin typeface="Arial" panose="020B0604020202020204"/>
               </a:defRPr>
             </a:pPr>
             <a:r>
@@ -10893,7 +10866,7 @@
                 <a:solidFill>
                   <a:srgbClr val="D4A017"/>
                 </a:solidFill>
-                <a:latin typeface="Arial"/>
+                <a:latin typeface="Arial" panose="020B0604020202020204"/>
               </a:defRPr>
             </a:pPr>
             <a:r>
@@ -10970,7 +10943,7 @@
                 <a:solidFill>
                   <a:srgbClr val="2D5016"/>
                 </a:solidFill>
-                <a:latin typeface="Arial"/>
+                <a:latin typeface="Arial" panose="020B0604020202020204"/>
               </a:defRPr>
             </a:pPr>
             <a:r>
@@ -11047,7 +11020,7 @@
                 <a:solidFill>
                   <a:srgbClr val="333333"/>
                 </a:solidFill>
-                <a:latin typeface="Arial"/>
+                <a:latin typeface="Arial" panose="020B0604020202020204"/>
               </a:defRPr>
             </a:pPr>
             <a:r>
@@ -11124,7 +11097,7 @@
                 <a:solidFill>
                   <a:srgbClr val="333333"/>
                 </a:solidFill>
-                <a:latin typeface="Arial"/>
+                <a:latin typeface="Arial" panose="020B0604020202020204"/>
               </a:defRPr>
             </a:pPr>
             <a:r>
@@ -11201,7 +11174,7 @@
                 <a:solidFill>
                   <a:srgbClr val="333333"/>
                 </a:solidFill>
-                <a:latin typeface="Arial"/>
+                <a:latin typeface="Arial" panose="020B0604020202020204"/>
               </a:defRPr>
             </a:pPr>
             <a:r>
@@ -11278,7 +11251,7 @@
                 <a:solidFill>
                   <a:srgbClr val="D4A017"/>
                 </a:solidFill>
-                <a:latin typeface="Arial"/>
+                <a:latin typeface="Arial" panose="020B0604020202020204"/>
               </a:defRPr>
             </a:pPr>
             <a:r>
@@ -11355,7 +11328,7 @@
                 <a:solidFill>
                   <a:srgbClr val="2D5016"/>
                 </a:solidFill>
-                <a:latin typeface="Arial"/>
+                <a:latin typeface="Arial" panose="020B0604020202020204"/>
               </a:defRPr>
             </a:pPr>
             <a:r>
@@ -11432,7 +11405,7 @@
                 <a:solidFill>
                   <a:srgbClr val="333333"/>
                 </a:solidFill>
-                <a:latin typeface="Arial"/>
+                <a:latin typeface="Arial" panose="020B0604020202020204"/>
               </a:defRPr>
             </a:pPr>
             <a:r>
@@ -11509,7 +11482,7 @@
                 <a:solidFill>
                   <a:srgbClr val="333333"/>
                 </a:solidFill>
-                <a:latin typeface="Arial"/>
+                <a:latin typeface="Arial" panose="020B0604020202020204"/>
               </a:defRPr>
             </a:pPr>
             <a:r>
@@ -11586,7 +11559,7 @@
                 <a:solidFill>
                   <a:srgbClr val="333333"/>
                 </a:solidFill>
-                <a:latin typeface="Arial"/>
+                <a:latin typeface="Arial" panose="020B0604020202020204"/>
               </a:defRPr>
             </a:pPr>
             <a:r>
@@ -11663,7 +11636,7 @@
                 <a:solidFill>
                   <a:srgbClr val="D4A017"/>
                 </a:solidFill>
-                <a:latin typeface="Arial"/>
+                <a:latin typeface="Arial" panose="020B0604020202020204"/>
               </a:defRPr>
             </a:pPr>
             <a:r>
@@ -11740,7 +11713,7 @@
                 <a:solidFill>
                   <a:srgbClr val="2D5016"/>
                 </a:solidFill>
-                <a:latin typeface="Arial"/>
+                <a:latin typeface="Arial" panose="020B0604020202020204"/>
               </a:defRPr>
             </a:pPr>
             <a:r>
@@ -11817,7 +11790,7 @@
                 <a:solidFill>
                   <a:srgbClr val="333333"/>
                 </a:solidFill>
-                <a:latin typeface="Arial"/>
+                <a:latin typeface="Arial" panose="020B0604020202020204"/>
               </a:defRPr>
             </a:pPr>
             <a:r>
@@ -11894,7 +11867,7 @@
                 <a:solidFill>
                   <a:srgbClr val="333333"/>
                 </a:solidFill>
-                <a:latin typeface="Arial"/>
+                <a:latin typeface="Arial" panose="020B0604020202020204"/>
               </a:defRPr>
             </a:pPr>
             <a:r>
@@ -11971,7 +11944,7 @@
                 <a:solidFill>
                   <a:srgbClr val="333333"/>
                 </a:solidFill>
-                <a:latin typeface="Arial"/>
+                <a:latin typeface="Arial" panose="020B0604020202020204"/>
               </a:defRPr>
             </a:pPr>
             <a:r>
@@ -12048,7 +12021,7 @@
                 <a:solidFill>
                   <a:srgbClr val="D4A017"/>
                 </a:solidFill>
-                <a:latin typeface="Arial"/>
+                <a:latin typeface="Arial" panose="020B0604020202020204"/>
               </a:defRPr>
             </a:pPr>
             <a:r>
@@ -12125,7 +12098,7 @@
                 <a:solidFill>
                   <a:srgbClr val="2D5016"/>
                 </a:solidFill>
-                <a:latin typeface="Arial"/>
+                <a:latin typeface="Arial" panose="020B0604020202020204"/>
               </a:defRPr>
             </a:pPr>
             <a:r>
@@ -12202,7 +12175,7 @@
                 <a:solidFill>
                   <a:srgbClr val="333333"/>
                 </a:solidFill>
-                <a:latin typeface="Arial"/>
+                <a:latin typeface="Arial" panose="020B0604020202020204"/>
               </a:defRPr>
             </a:pPr>
             <a:r>
@@ -12279,7 +12252,7 @@
                 <a:solidFill>
                   <a:srgbClr val="333333"/>
                 </a:solidFill>
-                <a:latin typeface="Arial"/>
+                <a:latin typeface="Arial" panose="020B0604020202020204"/>
               </a:defRPr>
             </a:pPr>
             <a:r>
@@ -12356,7 +12329,7 @@
                 <a:solidFill>
                   <a:srgbClr val="333333"/>
                 </a:solidFill>
-                <a:latin typeface="Arial"/>
+                <a:latin typeface="Arial" panose="020B0604020202020204"/>
               </a:defRPr>
             </a:pPr>
             <a:r>
@@ -12433,7 +12406,7 @@
                 <a:solidFill>
                   <a:srgbClr val="D4A017"/>
                 </a:solidFill>
-                <a:latin typeface="Arial"/>
+                <a:latin typeface="Arial" panose="020B0604020202020204"/>
               </a:defRPr>
             </a:pPr>
             <a:r>
@@ -12510,7 +12483,7 @@
                 <a:solidFill>
                   <a:srgbClr val="2D5016"/>
                 </a:solidFill>
-                <a:latin typeface="Arial"/>
+                <a:latin typeface="Arial" panose="020B0604020202020204"/>
               </a:defRPr>
             </a:pPr>
             <a:r>
@@ -12587,7 +12560,7 @@
                 <a:solidFill>
                   <a:srgbClr val="333333"/>
                 </a:solidFill>
-                <a:latin typeface="Arial"/>
+                <a:latin typeface="Arial" panose="020B0604020202020204"/>
               </a:defRPr>
             </a:pPr>
             <a:r>
@@ -12664,7 +12637,7 @@
                 <a:solidFill>
                   <a:srgbClr val="333333"/>
                 </a:solidFill>
-                <a:latin typeface="Arial"/>
+                <a:latin typeface="Arial" panose="020B0604020202020204"/>
               </a:defRPr>
             </a:pPr>
             <a:r>
@@ -12741,7 +12714,7 @@
                 <a:solidFill>
                   <a:srgbClr val="333333"/>
                 </a:solidFill>
-                <a:latin typeface="Arial"/>
+                <a:latin typeface="Arial" panose="020B0604020202020204"/>
               </a:defRPr>
             </a:pPr>
             <a:r>
@@ -12818,7 +12791,7 @@
                 <a:solidFill>
                   <a:srgbClr val="D4A017"/>
                 </a:solidFill>
-                <a:latin typeface="Arial"/>
+                <a:latin typeface="Arial" panose="020B0604020202020204"/>
               </a:defRPr>
             </a:pPr>
             <a:r>
@@ -12836,7 +12809,7 @@
 </file>
 
 <file path=ppt/slides/slide22.xml><?xml version="1.0" encoding="utf-8"?>
-<p:sld xmlns:a="http://schemas.openxmlformats.org/drawingml/2006/main" xmlns:p="http://schemas.openxmlformats.org/presentationml/2006/main" xmlns:r="http://schemas.openxmlformats.org/officeDocument/2006/relationships">
+<p:sld xmlns:a="http://schemas.openxmlformats.org/drawingml/2006/main" xmlns:r="http://schemas.openxmlformats.org/officeDocument/2006/relationships" xmlns:p="http://schemas.openxmlformats.org/presentationml/2006/main">
   <p:cSld>
     <p:bg>
       <p:bgPr>
@@ -12878,7 +12851,7 @@
                 <a:solidFill>
                   <a:srgbClr val="2D5016"/>
                 </a:solidFill>
-                <a:latin typeface="Arial"/>
+                <a:latin typeface="Arial" panose="020B0604020202020204"/>
               </a:defRPr>
             </a:pPr>
             <a:r>
@@ -12955,7 +12928,7 @@
                 <a:solidFill>
                   <a:srgbClr val="FFFFFF"/>
                 </a:solidFill>
-                <a:latin typeface="Arial"/>
+                <a:latin typeface="Arial" panose="020B0604020202020204"/>
               </a:defRPr>
             </a:pPr>
             <a:r>
@@ -13032,7 +13005,7 @@
                 <a:solidFill>
                   <a:srgbClr val="FFFFFF"/>
                 </a:solidFill>
-                <a:latin typeface="Arial"/>
+                <a:latin typeface="Arial" panose="020B0604020202020204"/>
               </a:defRPr>
             </a:pPr>
             <a:r>
@@ -13109,7 +13082,7 @@
                 <a:solidFill>
                   <a:srgbClr val="FFFFFF"/>
                 </a:solidFill>
-                <a:latin typeface="Arial"/>
+                <a:latin typeface="Arial" panose="020B0604020202020204"/>
               </a:defRPr>
             </a:pPr>
             <a:r>
@@ -13186,7 +13159,7 @@
                 <a:solidFill>
                   <a:srgbClr val="FFFFFF"/>
                 </a:solidFill>
-                <a:latin typeface="Arial"/>
+                <a:latin typeface="Arial" panose="020B0604020202020204"/>
               </a:defRPr>
             </a:pPr>
             <a:r>
@@ -13263,7 +13236,7 @@
                 <a:solidFill>
                   <a:srgbClr val="FFFFFF"/>
                 </a:solidFill>
-                <a:latin typeface="Arial"/>
+                <a:latin typeface="Arial" panose="020B0604020202020204"/>
               </a:defRPr>
             </a:pPr>
             <a:r>
@@ -13340,7 +13313,7 @@
                 <a:solidFill>
                   <a:srgbClr val="2D5016"/>
                 </a:solidFill>
-                <a:latin typeface="Arial"/>
+                <a:latin typeface="Arial" panose="020B0604020202020204"/>
               </a:defRPr>
             </a:pPr>
             <a:r>
@@ -13417,7 +13390,7 @@
                 <a:solidFill>
                   <a:srgbClr val="333333"/>
                 </a:solidFill>
-                <a:latin typeface="Arial"/>
+                <a:latin typeface="Arial" panose="020B0604020202020204"/>
               </a:defRPr>
             </a:pPr>
             <a:r>
@@ -13494,7 +13467,7 @@
                 <a:solidFill>
                   <a:srgbClr val="333333"/>
                 </a:solidFill>
-                <a:latin typeface="Arial"/>
+                <a:latin typeface="Arial" panose="020B0604020202020204"/>
               </a:defRPr>
             </a:pPr>
             <a:r>
@@ -13571,7 +13544,7 @@
                 <a:solidFill>
                   <a:srgbClr val="333333"/>
                 </a:solidFill>
-                <a:latin typeface="Arial"/>
+                <a:latin typeface="Arial" panose="020B0604020202020204"/>
               </a:defRPr>
             </a:pPr>
             <a:r>
@@ -13648,7 +13621,7 @@
                 <a:solidFill>
                   <a:srgbClr val="D4A017"/>
                 </a:solidFill>
-                <a:latin typeface="Arial"/>
+                <a:latin typeface="Arial" panose="020B0604020202020204"/>
               </a:defRPr>
             </a:pPr>
             <a:r>
@@ -13725,7 +13698,7 @@
                 <a:solidFill>
                   <a:srgbClr val="2D5016"/>
                 </a:solidFill>
-                <a:latin typeface="Arial"/>
+                <a:latin typeface="Arial" panose="020B0604020202020204"/>
               </a:defRPr>
             </a:pPr>
             <a:r>
@@ -13802,7 +13775,7 @@
                 <a:solidFill>
                   <a:srgbClr val="333333"/>
                 </a:solidFill>
-                <a:latin typeface="Arial"/>
+                <a:latin typeface="Arial" panose="020B0604020202020204"/>
               </a:defRPr>
             </a:pPr>
             <a:r>
@@ -13879,7 +13852,7 @@
                 <a:solidFill>
                   <a:srgbClr val="333333"/>
                 </a:solidFill>
-                <a:latin typeface="Arial"/>
+                <a:latin typeface="Arial" panose="020B0604020202020204"/>
               </a:defRPr>
             </a:pPr>
             <a:r>
@@ -13956,7 +13929,7 @@
                 <a:solidFill>
                   <a:srgbClr val="333333"/>
                 </a:solidFill>
-                <a:latin typeface="Arial"/>
+                <a:latin typeface="Arial" panose="020B0604020202020204"/>
               </a:defRPr>
             </a:pPr>
             <a:r>
@@ -14033,7 +14006,7 @@
                 <a:solidFill>
                   <a:srgbClr val="D4A017"/>
                 </a:solidFill>
-                <a:latin typeface="Arial"/>
+                <a:latin typeface="Arial" panose="020B0604020202020204"/>
               </a:defRPr>
             </a:pPr>
             <a:r>
@@ -14110,7 +14083,7 @@
                 <a:solidFill>
                   <a:srgbClr val="2D5016"/>
                 </a:solidFill>
-                <a:latin typeface="Arial"/>
+                <a:latin typeface="Arial" panose="020B0604020202020204"/>
               </a:defRPr>
             </a:pPr>
             <a:r>
@@ -14187,7 +14160,7 @@
                 <a:solidFill>
                   <a:srgbClr val="333333"/>
                 </a:solidFill>
-                <a:latin typeface="Arial"/>
+                <a:latin typeface="Arial" panose="020B0604020202020204"/>
               </a:defRPr>
             </a:pPr>
             <a:r>
@@ -14264,7 +14237,7 @@
                 <a:solidFill>
                   <a:srgbClr val="333333"/>
                 </a:solidFill>
-                <a:latin typeface="Arial"/>
+                <a:latin typeface="Arial" panose="020B0604020202020204"/>
               </a:defRPr>
             </a:pPr>
             <a:r>
@@ -14341,7 +14314,7 @@
                 <a:solidFill>
                   <a:srgbClr val="333333"/>
                 </a:solidFill>
-                <a:latin typeface="Arial"/>
+                <a:latin typeface="Arial" panose="020B0604020202020204"/>
               </a:defRPr>
             </a:pPr>
             <a:r>
@@ -14418,7 +14391,7 @@
                 <a:solidFill>
                   <a:srgbClr val="D4A017"/>
                 </a:solidFill>
-                <a:latin typeface="Arial"/>
+                <a:latin typeface="Arial" panose="020B0604020202020204"/>
               </a:defRPr>
             </a:pPr>
             <a:r>
@@ -14478,8 +14451,8 @@
         </p:nvSpPr>
         <p:spPr>
           <a:xfrm>
-            <a:off x="548640" y="4023360"/>
-            <a:ext cx="411480" cy="457200"/>
+            <a:off x="427990" y="4023360"/>
+            <a:ext cx="532130" cy="457200"/>
           </a:xfrm>
           <a:prstGeom prst="rect">
             <a:avLst/>
@@ -14495,7 +14468,7 @@
                 <a:solidFill>
                   <a:srgbClr val="2D5016"/>
                 </a:solidFill>
-                <a:latin typeface="Arial"/>
+                <a:latin typeface="Arial" panose="020B0604020202020204"/>
               </a:defRPr>
             </a:pPr>
             <a:r>
@@ -14572,7 +14545,7 @@
                 <a:solidFill>
                   <a:srgbClr val="333333"/>
                 </a:solidFill>
-                <a:latin typeface="Arial"/>
+                <a:latin typeface="Arial" panose="020B0604020202020204"/>
               </a:defRPr>
             </a:pPr>
             <a:r>
@@ -14649,7 +14622,7 @@
                 <a:solidFill>
                   <a:srgbClr val="333333"/>
                 </a:solidFill>
-                <a:latin typeface="Arial"/>
+                <a:latin typeface="Arial" panose="020B0604020202020204"/>
               </a:defRPr>
             </a:pPr>
             <a:r>
@@ -14726,7 +14699,7 @@
                 <a:solidFill>
                   <a:srgbClr val="333333"/>
                 </a:solidFill>
-                <a:latin typeface="Arial"/>
+                <a:latin typeface="Arial" panose="020B0604020202020204"/>
               </a:defRPr>
             </a:pPr>
             <a:r>
@@ -14803,7 +14776,7 @@
                 <a:solidFill>
                   <a:srgbClr val="D4A017"/>
                 </a:solidFill>
-                <a:latin typeface="Arial"/>
+                <a:latin typeface="Arial" panose="020B0604020202020204"/>
               </a:defRPr>
             </a:pPr>
             <a:r>
@@ -14863,8 +14836,8 @@
         </p:nvSpPr>
         <p:spPr>
           <a:xfrm>
-            <a:off x="548640" y="4846320"/>
-            <a:ext cx="411480" cy="457200"/>
+            <a:off x="457200" y="4846320"/>
+            <a:ext cx="502920" cy="457200"/>
           </a:xfrm>
           <a:prstGeom prst="rect">
             <a:avLst/>
@@ -14880,7 +14853,7 @@
                 <a:solidFill>
                   <a:srgbClr val="2D5016"/>
                 </a:solidFill>
-                <a:latin typeface="Arial"/>
+                <a:latin typeface="Arial" panose="020B0604020202020204"/>
               </a:defRPr>
             </a:pPr>
             <a:r>
@@ -14957,7 +14930,7 @@
                 <a:solidFill>
                   <a:srgbClr val="333333"/>
                 </a:solidFill>
-                <a:latin typeface="Arial"/>
+                <a:latin typeface="Arial" panose="020B0604020202020204"/>
               </a:defRPr>
             </a:pPr>
             <a:r>
@@ -15034,7 +15007,7 @@
                 <a:solidFill>
                   <a:srgbClr val="333333"/>
                 </a:solidFill>
-                <a:latin typeface="Arial"/>
+                <a:latin typeface="Arial" panose="020B0604020202020204"/>
               </a:defRPr>
             </a:pPr>
             <a:r>
@@ -15111,7 +15084,7 @@
                 <a:solidFill>
                   <a:srgbClr val="333333"/>
                 </a:solidFill>
-                <a:latin typeface="Arial"/>
+                <a:latin typeface="Arial" panose="020B0604020202020204"/>
               </a:defRPr>
             </a:pPr>
             <a:r>
@@ -15188,7 +15161,7 @@
                 <a:solidFill>
                   <a:srgbClr val="D4A017"/>
                 </a:solidFill>
-                <a:latin typeface="Arial"/>
+                <a:latin typeface="Arial" panose="020B0604020202020204"/>
               </a:defRPr>
             </a:pPr>
             <a:r>
@@ -15248,8 +15221,8 @@
         </p:nvSpPr>
         <p:spPr>
           <a:xfrm>
-            <a:off x="548640" y="5669280"/>
-            <a:ext cx="411480" cy="457200"/>
+            <a:off x="469265" y="5669280"/>
+            <a:ext cx="490855" cy="457200"/>
           </a:xfrm>
           <a:prstGeom prst="rect">
             <a:avLst/>
@@ -15265,7 +15238,7 @@
                 <a:solidFill>
                   <a:srgbClr val="2D5016"/>
                 </a:solidFill>
-                <a:latin typeface="Arial"/>
+                <a:latin typeface="Arial" panose="020B0604020202020204"/>
               </a:defRPr>
             </a:pPr>
             <a:r>
@@ -15342,7 +15315,7 @@
                 <a:solidFill>
                   <a:srgbClr val="333333"/>
                 </a:solidFill>
-                <a:latin typeface="Arial"/>
+                <a:latin typeface="Arial" panose="020B0604020202020204"/>
               </a:defRPr>
             </a:pPr>
             <a:r>
@@ -15419,7 +15392,7 @@
                 <a:solidFill>
                   <a:srgbClr val="333333"/>
                 </a:solidFill>
-                <a:latin typeface="Arial"/>
+                <a:latin typeface="Arial" panose="020B0604020202020204"/>
               </a:defRPr>
             </a:pPr>
             <a:r>
@@ -15496,7 +15469,7 @@
                 <a:solidFill>
                   <a:srgbClr val="333333"/>
                 </a:solidFill>
-                <a:latin typeface="Arial"/>
+                <a:latin typeface="Arial" panose="020B0604020202020204"/>
               </a:defRPr>
             </a:pPr>
             <a:r>
@@ -15573,7 +15546,7 @@
                 <a:solidFill>
                   <a:srgbClr val="D4A017"/>
                 </a:solidFill>
-                <a:latin typeface="Arial"/>
+                <a:latin typeface="Arial" panose="020B0604020202020204"/>
               </a:defRPr>
             </a:pPr>
             <a:r>
@@ -15591,7 +15564,7 @@
 </file>
 
 <file path=ppt/slides/slide23.xml><?xml version="1.0" encoding="utf-8"?>
-<p:sld xmlns:a="http://schemas.openxmlformats.org/drawingml/2006/main" xmlns:p="http://schemas.openxmlformats.org/presentationml/2006/main" xmlns:r="http://schemas.openxmlformats.org/officeDocument/2006/relationships">
+<p:sld xmlns:a="http://schemas.openxmlformats.org/drawingml/2006/main" xmlns:r="http://schemas.openxmlformats.org/officeDocument/2006/relationships" xmlns:p="http://schemas.openxmlformats.org/presentationml/2006/main">
   <p:cSld>
     <p:bg>
       <p:bgPr>
@@ -15633,7 +15606,7 @@
                 <a:solidFill>
                   <a:srgbClr val="2D5016"/>
                 </a:solidFill>
-                <a:latin typeface="Arial"/>
+                <a:latin typeface="Arial" panose="020B0604020202020204"/>
               </a:defRPr>
             </a:pPr>
             <a:r>
@@ -15710,7 +15683,7 @@
                 <a:solidFill>
                   <a:srgbClr val="FFFFFF"/>
                 </a:solidFill>
-                <a:latin typeface="Arial"/>
+                <a:latin typeface="Arial" panose="020B0604020202020204"/>
               </a:defRPr>
             </a:pPr>
             <a:r>
@@ -15787,7 +15760,7 @@
                 <a:solidFill>
                   <a:srgbClr val="FFFFFF"/>
                 </a:solidFill>
-                <a:latin typeface="Arial"/>
+                <a:latin typeface="Arial" panose="020B0604020202020204"/>
               </a:defRPr>
             </a:pPr>
             <a:r>
@@ -15864,7 +15837,7 @@
                 <a:solidFill>
                   <a:srgbClr val="FFFFFF"/>
                 </a:solidFill>
-                <a:latin typeface="Arial"/>
+                <a:latin typeface="Arial" panose="020B0604020202020204"/>
               </a:defRPr>
             </a:pPr>
             <a:r>
@@ -15941,7 +15914,7 @@
                 <a:solidFill>
                   <a:srgbClr val="FFFFFF"/>
                 </a:solidFill>
-                <a:latin typeface="Arial"/>
+                <a:latin typeface="Arial" panose="020B0604020202020204"/>
               </a:defRPr>
             </a:pPr>
             <a:r>
@@ -16018,7 +15991,7 @@
                 <a:solidFill>
                   <a:srgbClr val="FFFFFF"/>
                 </a:solidFill>
-                <a:latin typeface="Arial"/>
+                <a:latin typeface="Arial" panose="020B0604020202020204"/>
               </a:defRPr>
             </a:pPr>
             <a:r>
@@ -16078,8 +16051,8 @@
         </p:nvSpPr>
         <p:spPr>
           <a:xfrm>
-            <a:off x="548640" y="1554480"/>
-            <a:ext cx="411480" cy="457200"/>
+            <a:off x="457200" y="1554480"/>
+            <a:ext cx="502920" cy="457200"/>
           </a:xfrm>
           <a:prstGeom prst="rect">
             <a:avLst/>
@@ -16095,7 +16068,7 @@
                 <a:solidFill>
                   <a:srgbClr val="2D5016"/>
                 </a:solidFill>
-                <a:latin typeface="Arial"/>
+                <a:latin typeface="Arial" panose="020B0604020202020204"/>
               </a:defRPr>
             </a:pPr>
             <a:r>
@@ -16172,7 +16145,7 @@
                 <a:solidFill>
                   <a:srgbClr val="333333"/>
                 </a:solidFill>
-                <a:latin typeface="Arial"/>
+                <a:latin typeface="Arial" panose="020B0604020202020204"/>
               </a:defRPr>
             </a:pPr>
             <a:r>
@@ -16249,7 +16222,7 @@
                 <a:solidFill>
                   <a:srgbClr val="333333"/>
                 </a:solidFill>
-                <a:latin typeface="Arial"/>
+                <a:latin typeface="Arial" panose="020B0604020202020204"/>
               </a:defRPr>
             </a:pPr>
             <a:r>
@@ -16326,7 +16299,7 @@
                 <a:solidFill>
                   <a:srgbClr val="333333"/>
                 </a:solidFill>
-                <a:latin typeface="Arial"/>
+                <a:latin typeface="Arial" panose="020B0604020202020204"/>
               </a:defRPr>
             </a:pPr>
             <a:r>
@@ -16403,7 +16376,7 @@
                 <a:solidFill>
                   <a:srgbClr val="D4A017"/>
                 </a:solidFill>
-                <a:latin typeface="Arial"/>
+                <a:latin typeface="Arial" panose="020B0604020202020204"/>
               </a:defRPr>
             </a:pPr>
             <a:r>
@@ -16463,8 +16436,8 @@
         </p:nvSpPr>
         <p:spPr>
           <a:xfrm>
-            <a:off x="548640" y="2377440"/>
-            <a:ext cx="411480" cy="457200"/>
+            <a:off x="443865" y="2377440"/>
+            <a:ext cx="516255" cy="457200"/>
           </a:xfrm>
           <a:prstGeom prst="rect">
             <a:avLst/>
@@ -16480,7 +16453,7 @@
                 <a:solidFill>
                   <a:srgbClr val="2D5016"/>
                 </a:solidFill>
-                <a:latin typeface="Arial"/>
+                <a:latin typeface="Arial" panose="020B0604020202020204"/>
               </a:defRPr>
             </a:pPr>
             <a:r>
@@ -16557,7 +16530,7 @@
                 <a:solidFill>
                   <a:srgbClr val="333333"/>
                 </a:solidFill>
-                <a:latin typeface="Arial"/>
+                <a:latin typeface="Arial" panose="020B0604020202020204"/>
               </a:defRPr>
             </a:pPr>
             <a:r>
@@ -16634,7 +16607,7 @@
                 <a:solidFill>
                   <a:srgbClr val="333333"/>
                 </a:solidFill>
-                <a:latin typeface="Arial"/>
+                <a:latin typeface="Arial" panose="020B0604020202020204"/>
               </a:defRPr>
             </a:pPr>
             <a:r>
@@ -16711,7 +16684,7 @@
                 <a:solidFill>
                   <a:srgbClr val="333333"/>
                 </a:solidFill>
-                <a:latin typeface="Arial"/>
+                <a:latin typeface="Arial" panose="020B0604020202020204"/>
               </a:defRPr>
             </a:pPr>
             <a:r>
@@ -16788,7 +16761,7 @@
                 <a:solidFill>
                   <a:srgbClr val="D4A017"/>
                 </a:solidFill>
-                <a:latin typeface="Arial"/>
+                <a:latin typeface="Arial" panose="020B0604020202020204"/>
               </a:defRPr>
             </a:pPr>
             <a:r>
@@ -16848,8 +16821,8 @@
         </p:nvSpPr>
         <p:spPr>
           <a:xfrm>
-            <a:off x="548640" y="3200400"/>
-            <a:ext cx="411480" cy="457200"/>
+            <a:off x="414020" y="3200400"/>
+            <a:ext cx="546100" cy="457200"/>
           </a:xfrm>
           <a:prstGeom prst="rect">
             <a:avLst/>
@@ -16865,7 +16838,7 @@
                 <a:solidFill>
                   <a:srgbClr val="2D5016"/>
                 </a:solidFill>
-                <a:latin typeface="Arial"/>
+                <a:latin typeface="Arial" panose="020B0604020202020204"/>
               </a:defRPr>
             </a:pPr>
             <a:r>
@@ -16942,7 +16915,7 @@
                 <a:solidFill>
                   <a:srgbClr val="333333"/>
                 </a:solidFill>
-                <a:latin typeface="Arial"/>
+                <a:latin typeface="Arial" panose="020B0604020202020204"/>
               </a:defRPr>
             </a:pPr>
             <a:r>
@@ -17019,7 +16992,7 @@
                 <a:solidFill>
                   <a:srgbClr val="333333"/>
                 </a:solidFill>
-                <a:latin typeface="Arial"/>
+                <a:latin typeface="Arial" panose="020B0604020202020204"/>
               </a:defRPr>
             </a:pPr>
             <a:r>
@@ -17096,7 +17069,7 @@
                 <a:solidFill>
                   <a:srgbClr val="333333"/>
                 </a:solidFill>
-                <a:latin typeface="Arial"/>
+                <a:latin typeface="Arial" panose="020B0604020202020204"/>
               </a:defRPr>
             </a:pPr>
             <a:r>
@@ -17173,7 +17146,7 @@
                 <a:solidFill>
                   <a:srgbClr val="D4A017"/>
                 </a:solidFill>
-                <a:latin typeface="Arial"/>
+                <a:latin typeface="Arial" panose="020B0604020202020204"/>
               </a:defRPr>
             </a:pPr>
             <a:r>
@@ -17233,8 +17206,8 @@
         </p:nvSpPr>
         <p:spPr>
           <a:xfrm>
-            <a:off x="548640" y="4023360"/>
-            <a:ext cx="411480" cy="457200"/>
+            <a:off x="431800" y="4023360"/>
+            <a:ext cx="528320" cy="457200"/>
           </a:xfrm>
           <a:prstGeom prst="rect">
             <a:avLst/>
@@ -17250,7 +17223,7 @@
                 <a:solidFill>
                   <a:srgbClr val="2D5016"/>
                 </a:solidFill>
-                <a:latin typeface="Arial"/>
+                <a:latin typeface="Arial" panose="020B0604020202020204"/>
               </a:defRPr>
             </a:pPr>
             <a:r>
@@ -17327,7 +17300,7 @@
                 <a:solidFill>
                   <a:srgbClr val="333333"/>
                 </a:solidFill>
-                <a:latin typeface="Arial"/>
+                <a:latin typeface="Arial" panose="020B0604020202020204"/>
               </a:defRPr>
             </a:pPr>
             <a:r>
@@ -17404,7 +17377,7 @@
                 <a:solidFill>
                   <a:srgbClr val="333333"/>
                 </a:solidFill>
-                <a:latin typeface="Arial"/>
+                <a:latin typeface="Arial" panose="020B0604020202020204"/>
               </a:defRPr>
             </a:pPr>
             <a:r>
@@ -17481,7 +17454,7 @@
                 <a:solidFill>
                   <a:srgbClr val="333333"/>
                 </a:solidFill>
-                <a:latin typeface="Arial"/>
+                <a:latin typeface="Arial" panose="020B0604020202020204"/>
               </a:defRPr>
             </a:pPr>
             <a:r>
@@ -17558,7 +17531,7 @@
                 <a:solidFill>
                   <a:srgbClr val="D4A017"/>
                 </a:solidFill>
-                <a:latin typeface="Arial"/>
+                <a:latin typeface="Arial" panose="020B0604020202020204"/>
               </a:defRPr>
             </a:pPr>
             <a:r>
@@ -17618,8 +17591,8 @@
         </p:nvSpPr>
         <p:spPr>
           <a:xfrm>
-            <a:off x="548640" y="4846320"/>
-            <a:ext cx="411480" cy="457200"/>
+            <a:off x="431800" y="4846320"/>
+            <a:ext cx="484505" cy="457200"/>
           </a:xfrm>
           <a:prstGeom prst="rect">
             <a:avLst/>
@@ -17635,7 +17608,7 @@
                 <a:solidFill>
                   <a:srgbClr val="2D5016"/>
                 </a:solidFill>
-                <a:latin typeface="Arial"/>
+                <a:latin typeface="Arial" panose="020B0604020202020204"/>
               </a:defRPr>
             </a:pPr>
             <a:r>
@@ -17712,7 +17685,7 @@
                 <a:solidFill>
                   <a:srgbClr val="333333"/>
                 </a:solidFill>
-                <a:latin typeface="Arial"/>
+                <a:latin typeface="Arial" panose="020B0604020202020204"/>
               </a:defRPr>
             </a:pPr>
             <a:r>
@@ -17789,7 +17762,7 @@
                 <a:solidFill>
                   <a:srgbClr val="333333"/>
                 </a:solidFill>
-                <a:latin typeface="Arial"/>
+                <a:latin typeface="Arial" panose="020B0604020202020204"/>
               </a:defRPr>
             </a:pPr>
             <a:r>
@@ -17866,7 +17839,7 @@
                 <a:solidFill>
                   <a:srgbClr val="333333"/>
                 </a:solidFill>
-                <a:latin typeface="Arial"/>
+                <a:latin typeface="Arial" panose="020B0604020202020204"/>
               </a:defRPr>
             </a:pPr>
             <a:r>
@@ -17943,7 +17916,7 @@
                 <a:solidFill>
                   <a:srgbClr val="D4A017"/>
                 </a:solidFill>
-                <a:latin typeface="Arial"/>
+                <a:latin typeface="Arial" panose="020B0604020202020204"/>
               </a:defRPr>
             </a:pPr>
             <a:r>
@@ -18003,8 +17976,8 @@
         </p:nvSpPr>
         <p:spPr>
           <a:xfrm>
-            <a:off x="548640" y="5669280"/>
-            <a:ext cx="411480" cy="457200"/>
+            <a:off x="504825" y="5669280"/>
+            <a:ext cx="455295" cy="457200"/>
           </a:xfrm>
           <a:prstGeom prst="rect">
             <a:avLst/>
@@ -18020,7 +17993,7 @@
                 <a:solidFill>
                   <a:srgbClr val="2D5016"/>
                 </a:solidFill>
-                <a:latin typeface="Arial"/>
+                <a:latin typeface="Arial" panose="020B0604020202020204"/>
               </a:defRPr>
             </a:pPr>
             <a:r>
@@ -18097,7 +18070,7 @@
                 <a:solidFill>
                   <a:srgbClr val="333333"/>
                 </a:solidFill>
-                <a:latin typeface="Arial"/>
+                <a:latin typeface="Arial" panose="020B0604020202020204"/>
               </a:defRPr>
             </a:pPr>
             <a:r>
@@ -18174,7 +18147,7 @@
                 <a:solidFill>
                   <a:srgbClr val="333333"/>
                 </a:solidFill>
-                <a:latin typeface="Arial"/>
+                <a:latin typeface="Arial" panose="020B0604020202020204"/>
               </a:defRPr>
             </a:pPr>
             <a:r>
@@ -18251,7 +18224,7 @@
                 <a:solidFill>
                   <a:srgbClr val="333333"/>
                 </a:solidFill>
-                <a:latin typeface="Arial"/>
+                <a:latin typeface="Arial" panose="020B0604020202020204"/>
               </a:defRPr>
             </a:pPr>
             <a:r>
@@ -18328,7 +18301,7 @@
                 <a:solidFill>
                   <a:srgbClr val="D4A017"/>
                 </a:solidFill>
-                <a:latin typeface="Arial"/>
+                <a:latin typeface="Arial" panose="020B0604020202020204"/>
               </a:defRPr>
             </a:pPr>
             <a:r>
@@ -18346,7 +18319,7 @@
 </file>
 
 <file path=ppt/slides/slide24.xml><?xml version="1.0" encoding="utf-8"?>
-<p:sld xmlns:a="http://schemas.openxmlformats.org/drawingml/2006/main" xmlns:p="http://schemas.openxmlformats.org/presentationml/2006/main" xmlns:r="http://schemas.openxmlformats.org/officeDocument/2006/relationships">
+<p:sld xmlns:a="http://schemas.openxmlformats.org/drawingml/2006/main" xmlns:r="http://schemas.openxmlformats.org/officeDocument/2006/relationships" xmlns:p="http://schemas.openxmlformats.org/presentationml/2006/main">
   <p:cSld>
     <p:bg>
       <p:bgPr>
@@ -18388,7 +18361,7 @@
                 <a:solidFill>
                   <a:srgbClr val="2D5016"/>
                 </a:solidFill>
-                <a:latin typeface="Arial"/>
+                <a:latin typeface="Arial" panose="020B0604020202020204"/>
               </a:defRPr>
             </a:pPr>
             <a:r>
@@ -18465,7 +18438,7 @@
                 <a:solidFill>
                   <a:srgbClr val="FFFFFF"/>
                 </a:solidFill>
-                <a:latin typeface="Arial"/>
+                <a:latin typeface="Arial" panose="020B0604020202020204"/>
               </a:defRPr>
             </a:pPr>
             <a:r>
@@ -18542,7 +18515,7 @@
                 <a:solidFill>
                   <a:srgbClr val="FFFFFF"/>
                 </a:solidFill>
-                <a:latin typeface="Arial"/>
+                <a:latin typeface="Arial" panose="020B0604020202020204"/>
               </a:defRPr>
             </a:pPr>
             <a:r>
@@ -18619,7 +18592,7 @@
                 <a:solidFill>
                   <a:srgbClr val="FFFFFF"/>
                 </a:solidFill>
-                <a:latin typeface="Arial"/>
+                <a:latin typeface="Arial" panose="020B0604020202020204"/>
               </a:defRPr>
             </a:pPr>
             <a:r>
@@ -18696,7 +18669,7 @@
                 <a:solidFill>
                   <a:srgbClr val="FFFFFF"/>
                 </a:solidFill>
-                <a:latin typeface="Arial"/>
+                <a:latin typeface="Arial" panose="020B0604020202020204"/>
               </a:defRPr>
             </a:pPr>
             <a:r>
@@ -18773,7 +18746,7 @@
                 <a:solidFill>
                   <a:srgbClr val="FFFFFF"/>
                 </a:solidFill>
-                <a:latin typeface="Arial"/>
+                <a:latin typeface="Arial" panose="020B0604020202020204"/>
               </a:defRPr>
             </a:pPr>
             <a:r>
@@ -18833,8 +18806,8 @@
         </p:nvSpPr>
         <p:spPr>
           <a:xfrm>
-            <a:off x="548640" y="1554480"/>
-            <a:ext cx="411480" cy="457200"/>
+            <a:off x="463550" y="1554480"/>
+            <a:ext cx="496570" cy="457200"/>
           </a:xfrm>
           <a:prstGeom prst="rect">
             <a:avLst/>
@@ -18850,7 +18823,7 @@
                 <a:solidFill>
                   <a:srgbClr val="2D5016"/>
                 </a:solidFill>
-                <a:latin typeface="Arial"/>
+                <a:latin typeface="Arial" panose="020B0604020202020204"/>
               </a:defRPr>
             </a:pPr>
             <a:r>
@@ -18927,7 +18900,7 @@
                 <a:solidFill>
                   <a:srgbClr val="333333"/>
                 </a:solidFill>
-                <a:latin typeface="Arial"/>
+                <a:latin typeface="Arial" panose="020B0604020202020204"/>
               </a:defRPr>
             </a:pPr>
             <a:r>
@@ -19004,7 +18977,7 @@
                 <a:solidFill>
                   <a:srgbClr val="333333"/>
                 </a:solidFill>
-                <a:latin typeface="Arial"/>
+                <a:latin typeface="Arial" panose="020B0604020202020204"/>
               </a:defRPr>
             </a:pPr>
             <a:r>
@@ -19081,7 +19054,7 @@
                 <a:solidFill>
                   <a:srgbClr val="333333"/>
                 </a:solidFill>
-                <a:latin typeface="Arial"/>
+                <a:latin typeface="Arial" panose="020B0604020202020204"/>
               </a:defRPr>
             </a:pPr>
             <a:r>
@@ -19158,7 +19131,7 @@
                 <a:solidFill>
                   <a:srgbClr val="D4A017"/>
                 </a:solidFill>
-                <a:latin typeface="Arial"/>
+                <a:latin typeface="Arial" panose="020B0604020202020204"/>
               </a:defRPr>
             </a:pPr>
             <a:r>
@@ -19218,8 +19191,8 @@
         </p:nvSpPr>
         <p:spPr>
           <a:xfrm>
-            <a:off x="548640" y="2377440"/>
-            <a:ext cx="411480" cy="457200"/>
+            <a:off x="415925" y="2377440"/>
+            <a:ext cx="544195" cy="457200"/>
           </a:xfrm>
           <a:prstGeom prst="rect">
             <a:avLst/>
@@ -19235,7 +19208,7 @@
                 <a:solidFill>
                   <a:srgbClr val="2D5016"/>
                 </a:solidFill>
-                <a:latin typeface="Arial"/>
+                <a:latin typeface="Arial" panose="020B0604020202020204"/>
               </a:defRPr>
             </a:pPr>
             <a:r>
@@ -19312,7 +19285,7 @@
                 <a:solidFill>
                   <a:srgbClr val="333333"/>
                 </a:solidFill>
-                <a:latin typeface="Arial"/>
+                <a:latin typeface="Arial" panose="020B0604020202020204"/>
               </a:defRPr>
             </a:pPr>
             <a:r>
@@ -19389,7 +19362,7 @@
                 <a:solidFill>
                   <a:srgbClr val="333333"/>
                 </a:solidFill>
-                <a:latin typeface="Arial"/>
+                <a:latin typeface="Arial" panose="020B0604020202020204"/>
               </a:defRPr>
             </a:pPr>
             <a:r>
@@ -19466,7 +19439,7 @@
                 <a:solidFill>
                   <a:srgbClr val="333333"/>
                 </a:solidFill>
-                <a:latin typeface="Arial"/>
+                <a:latin typeface="Arial" panose="020B0604020202020204"/>
               </a:defRPr>
             </a:pPr>
             <a:r>
@@ -19543,7 +19516,7 @@
                 <a:solidFill>
                   <a:srgbClr val="D4A017"/>
                 </a:solidFill>
-                <a:latin typeface="Arial"/>
+                <a:latin typeface="Arial" panose="020B0604020202020204"/>
               </a:defRPr>
             </a:pPr>
             <a:r>
@@ -19603,8 +19576,8 @@
         </p:nvSpPr>
         <p:spPr>
           <a:xfrm>
-            <a:off x="548640" y="3200400"/>
-            <a:ext cx="411480" cy="457200"/>
+            <a:off x="415925" y="3200400"/>
+            <a:ext cx="544195" cy="457200"/>
           </a:xfrm>
           <a:prstGeom prst="rect">
             <a:avLst/>
@@ -19620,7 +19593,7 @@
                 <a:solidFill>
                   <a:srgbClr val="2D5016"/>
                 </a:solidFill>
-                <a:latin typeface="Arial"/>
+                <a:latin typeface="Arial" panose="020B0604020202020204"/>
               </a:defRPr>
             </a:pPr>
             <a:r>
@@ -19697,7 +19670,7 @@
                 <a:solidFill>
                   <a:srgbClr val="333333"/>
                 </a:solidFill>
-                <a:latin typeface="Arial"/>
+                <a:latin typeface="Arial" panose="020B0604020202020204"/>
               </a:defRPr>
             </a:pPr>
             <a:r>
@@ -19774,7 +19747,7 @@
                 <a:solidFill>
                   <a:srgbClr val="333333"/>
                 </a:solidFill>
-                <a:latin typeface="Arial"/>
+                <a:latin typeface="Arial" panose="020B0604020202020204"/>
               </a:defRPr>
             </a:pPr>
             <a:r>
@@ -19851,7 +19824,7 @@
                 <a:solidFill>
                   <a:srgbClr val="333333"/>
                 </a:solidFill>
-                <a:latin typeface="Arial"/>
+                <a:latin typeface="Arial" panose="020B0604020202020204"/>
               </a:defRPr>
             </a:pPr>
             <a:r>
@@ -19928,7 +19901,7 @@
                 <a:solidFill>
                   <a:srgbClr val="D4A017"/>
                 </a:solidFill>
-                <a:latin typeface="Arial"/>
+                <a:latin typeface="Arial" panose="020B0604020202020204"/>
               </a:defRPr>
             </a:pPr>
             <a:r>
@@ -19988,8 +19961,8 @@
         </p:nvSpPr>
         <p:spPr>
           <a:xfrm>
-            <a:off x="548640" y="4023360"/>
-            <a:ext cx="411480" cy="457200"/>
+            <a:off x="456565" y="4023360"/>
+            <a:ext cx="503555" cy="457200"/>
           </a:xfrm>
           <a:prstGeom prst="rect">
             <a:avLst/>
@@ -20005,7 +19978,7 @@
                 <a:solidFill>
                   <a:srgbClr val="2D5016"/>
                 </a:solidFill>
-                <a:latin typeface="Arial"/>
+                <a:latin typeface="Arial" panose="020B0604020202020204"/>
               </a:defRPr>
             </a:pPr>
             <a:r>
@@ -20082,7 +20055,7 @@
                 <a:solidFill>
                   <a:srgbClr val="333333"/>
                 </a:solidFill>
-                <a:latin typeface="Arial"/>
+                <a:latin typeface="Arial" panose="020B0604020202020204"/>
               </a:defRPr>
             </a:pPr>
             <a:r>
@@ -20159,7 +20132,7 @@
                 <a:solidFill>
                   <a:srgbClr val="333333"/>
                 </a:solidFill>
-                <a:latin typeface="Arial"/>
+                <a:latin typeface="Arial" panose="020B0604020202020204"/>
               </a:defRPr>
             </a:pPr>
             <a:r>
@@ -20236,7 +20209,7 @@
                 <a:solidFill>
                   <a:srgbClr val="333333"/>
                 </a:solidFill>
-                <a:latin typeface="Arial"/>
+                <a:latin typeface="Arial" panose="020B0604020202020204"/>
               </a:defRPr>
             </a:pPr>
             <a:r>
@@ -20313,7 +20286,7 @@
                 <a:solidFill>
                   <a:srgbClr val="D4A017"/>
                 </a:solidFill>
-                <a:latin typeface="Arial"/>
+                <a:latin typeface="Arial" panose="020B0604020202020204"/>
               </a:defRPr>
             </a:pPr>
             <a:r>
@@ -20373,8 +20346,8 @@
         </p:nvSpPr>
         <p:spPr>
           <a:xfrm>
-            <a:off x="548640" y="4846320"/>
-            <a:ext cx="411480" cy="457200"/>
+            <a:off x="422275" y="4846320"/>
+            <a:ext cx="537845" cy="457200"/>
           </a:xfrm>
           <a:prstGeom prst="rect">
             <a:avLst/>
@@ -20390,7 +20363,7 @@
                 <a:solidFill>
                   <a:srgbClr val="2D5016"/>
                 </a:solidFill>
-                <a:latin typeface="Arial"/>
+                <a:latin typeface="Arial" panose="020B0604020202020204"/>
               </a:defRPr>
             </a:pPr>
             <a:r>
@@ -20467,7 +20440,7 @@
                 <a:solidFill>
                   <a:srgbClr val="333333"/>
                 </a:solidFill>
-                <a:latin typeface="Arial"/>
+                <a:latin typeface="Arial" panose="020B0604020202020204"/>
               </a:defRPr>
             </a:pPr>
             <a:r>
@@ -20544,7 +20517,7 @@
                 <a:solidFill>
                   <a:srgbClr val="333333"/>
                 </a:solidFill>
-                <a:latin typeface="Arial"/>
+                <a:latin typeface="Arial" panose="020B0604020202020204"/>
               </a:defRPr>
             </a:pPr>
             <a:r>
@@ -20621,7 +20594,7 @@
                 <a:solidFill>
                   <a:srgbClr val="333333"/>
                 </a:solidFill>
-                <a:latin typeface="Arial"/>
+                <a:latin typeface="Arial" panose="020B0604020202020204"/>
               </a:defRPr>
             </a:pPr>
             <a:r>
@@ -20698,7 +20671,7 @@
                 <a:solidFill>
                   <a:srgbClr val="D4A017"/>
                 </a:solidFill>
-                <a:latin typeface="Arial"/>
+                <a:latin typeface="Arial" panose="020B0604020202020204"/>
               </a:defRPr>
             </a:pPr>
             <a:r>
@@ -20758,8 +20731,8 @@
         </p:nvSpPr>
         <p:spPr>
           <a:xfrm>
-            <a:off x="548640" y="5669280"/>
-            <a:ext cx="411480" cy="457200"/>
+            <a:off x="427990" y="5669280"/>
+            <a:ext cx="532130" cy="457200"/>
           </a:xfrm>
           <a:prstGeom prst="rect">
             <a:avLst/>
@@ -20775,7 +20748,7 @@
                 <a:solidFill>
                   <a:srgbClr val="2D5016"/>
                 </a:solidFill>
-                <a:latin typeface="Arial"/>
+                <a:latin typeface="Arial" panose="020B0604020202020204"/>
               </a:defRPr>
             </a:pPr>
             <a:r>
@@ -20852,7 +20825,7 @@
                 <a:solidFill>
                   <a:srgbClr val="333333"/>
                 </a:solidFill>
-                <a:latin typeface="Arial"/>
+                <a:latin typeface="Arial" panose="020B0604020202020204"/>
               </a:defRPr>
             </a:pPr>
             <a:r>
@@ -20929,7 +20902,7 @@
                 <a:solidFill>
                   <a:srgbClr val="333333"/>
                 </a:solidFill>
-                <a:latin typeface="Arial"/>
+                <a:latin typeface="Arial" panose="020B0604020202020204"/>
               </a:defRPr>
             </a:pPr>
             <a:r>
@@ -21006,7 +20979,7 @@
                 <a:solidFill>
                   <a:srgbClr val="333333"/>
                 </a:solidFill>
-                <a:latin typeface="Arial"/>
+                <a:latin typeface="Arial" panose="020B0604020202020204"/>
               </a:defRPr>
             </a:pPr>
             <a:r>
@@ -21083,7 +21056,7 @@
                 <a:solidFill>
                   <a:srgbClr val="D4A017"/>
                 </a:solidFill>
-                <a:latin typeface="Arial"/>
+                <a:latin typeface="Arial" panose="020B0604020202020204"/>
               </a:defRPr>
             </a:pPr>
             <a:r>
@@ -21101,7 +21074,7 @@
 </file>
 
 <file path=ppt/slides/slide25.xml><?xml version="1.0" encoding="utf-8"?>
-<p:sld xmlns:a="http://schemas.openxmlformats.org/drawingml/2006/main" xmlns:p="http://schemas.openxmlformats.org/presentationml/2006/main" xmlns:r="http://schemas.openxmlformats.org/officeDocument/2006/relationships">
+<p:sld xmlns:a="http://schemas.openxmlformats.org/drawingml/2006/main" xmlns:r="http://schemas.openxmlformats.org/officeDocument/2006/relationships" xmlns:p="http://schemas.openxmlformats.org/presentationml/2006/main">
   <p:cSld>
     <p:bg>
       <p:bgPr>
@@ -21186,7 +21159,7 @@
                 <a:solidFill>
                   <a:srgbClr val="D4A017"/>
                 </a:solidFill>
-                <a:latin typeface="Arial"/>
+                <a:latin typeface="Arial" panose="020B0604020202020204"/>
               </a:defRPr>
             </a:pPr>
             <a:r>
@@ -21220,7 +21193,7 @@
                 <a:solidFill>
                   <a:srgbClr val="FFFFFF"/>
                 </a:solidFill>
-                <a:latin typeface="Arial"/>
+                <a:latin typeface="Arial" panose="020B0604020202020204"/>
               </a:defRPr>
             </a:pPr>
             <a:r>
@@ -21254,7 +21227,7 @@
                 <a:solidFill>
                   <a:srgbClr val="F5E6C8"/>
                 </a:solidFill>
-                <a:latin typeface="Arial"/>
+                <a:latin typeface="Arial" panose="020B0604020202020204"/>
               </a:defRPr>
             </a:pPr>
             <a:r>
@@ -21288,7 +21261,7 @@
                 <a:solidFill>
                   <a:srgbClr val="FFFFFF"/>
                 </a:solidFill>
-                <a:latin typeface="Arial"/>
+                <a:latin typeface="Arial" panose="020B0604020202020204"/>
               </a:defRPr>
             </a:pPr>
             <a:r>
@@ -21322,7 +21295,7 @@
                 <a:solidFill>
                   <a:srgbClr val="FFFFFF"/>
                 </a:solidFill>
-                <a:latin typeface="Arial"/>
+                <a:latin typeface="Arial" panose="020B0604020202020204"/>
               </a:defRPr>
             </a:pPr>
             <a:r>
@@ -21356,7 +21329,7 @@
                 <a:solidFill>
                   <a:srgbClr val="F5E6C8"/>
                 </a:solidFill>
-                <a:latin typeface="Arial"/>
+                <a:latin typeface="Arial" panose="020B0604020202020204"/>
               </a:defRPr>
             </a:pPr>
             <a:r>
@@ -21390,7 +21363,7 @@
                 <a:solidFill>
                   <a:srgbClr val="FFFFFF"/>
                 </a:solidFill>
-                <a:latin typeface="Arial"/>
+                <a:latin typeface="Arial" panose="020B0604020202020204"/>
               </a:defRPr>
             </a:pPr>
             <a:r>
@@ -21424,7 +21397,7 @@
                 <a:solidFill>
                   <a:srgbClr val="FFFFFF"/>
                 </a:solidFill>
-                <a:latin typeface="Arial"/>
+                <a:latin typeface="Arial" panose="020B0604020202020204"/>
               </a:defRPr>
             </a:pPr>
             <a:r>
@@ -21458,7 +21431,7 @@
                 <a:solidFill>
                   <a:srgbClr val="F5E6C8"/>
                 </a:solidFill>
-                <a:latin typeface="Arial"/>
+                <a:latin typeface="Arial" panose="020B0604020202020204"/>
               </a:defRPr>
             </a:pPr>
             <a:r>
@@ -21492,7 +21465,7 @@
                 <a:solidFill>
                   <a:srgbClr val="FFFFFF"/>
                 </a:solidFill>
-                <a:latin typeface="Arial"/>
+                <a:latin typeface="Arial" panose="020B0604020202020204"/>
               </a:defRPr>
             </a:pPr>
             <a:r>
@@ -21510,7 +21483,7 @@
 </file>
 
 <file path=ppt/slides/slide26.xml><?xml version="1.0" encoding="utf-8"?>
-<p:sld xmlns:a="http://schemas.openxmlformats.org/drawingml/2006/main" xmlns:p="http://schemas.openxmlformats.org/presentationml/2006/main" xmlns:r="http://schemas.openxmlformats.org/officeDocument/2006/relationships">
+<p:sld xmlns:a="http://schemas.openxmlformats.org/drawingml/2006/main" xmlns:r="http://schemas.openxmlformats.org/officeDocument/2006/relationships" xmlns:p="http://schemas.openxmlformats.org/presentationml/2006/main">
   <p:cSld>
     <p:bg>
       <p:bgPr>
@@ -21552,7 +21525,7 @@
                 <a:solidFill>
                   <a:srgbClr val="FFFFFF"/>
                 </a:solidFill>
-                <a:latin typeface="Arial"/>
+                <a:latin typeface="Arial" panose="020B0604020202020204"/>
               </a:defRPr>
             </a:pPr>
             <a:r>
@@ -21586,7 +21559,7 @@
                 <a:solidFill>
                   <a:srgbClr val="FFFFFF"/>
                 </a:solidFill>
-                <a:latin typeface="Arial"/>
+                <a:latin typeface="Arial" panose="020B0604020202020204"/>
               </a:defRPr>
             </a:pPr>
             <a:r>
@@ -21647,7 +21620,7 @@
 </file>
 
 <file path=ppt/slides/slide27.xml><?xml version="1.0" encoding="utf-8"?>
-<p:sld xmlns:a="http://schemas.openxmlformats.org/drawingml/2006/main" xmlns:p="http://schemas.openxmlformats.org/presentationml/2006/main" xmlns:r="http://schemas.openxmlformats.org/officeDocument/2006/relationships">
+<p:sld xmlns:a="http://schemas.openxmlformats.org/drawingml/2006/main" xmlns:r="http://schemas.openxmlformats.org/officeDocument/2006/relationships" xmlns:p="http://schemas.openxmlformats.org/presentationml/2006/main">
   <p:cSld>
     <p:bg>
       <p:bgPr>
@@ -21689,7 +21662,7 @@
                 <a:solidFill>
                   <a:srgbClr val="2D5016"/>
                 </a:solidFill>
-                <a:latin typeface="Arial"/>
+                <a:latin typeface="Arial" panose="020B0604020202020204"/>
               </a:defRPr>
             </a:pPr>
             <a:r>
@@ -21766,7 +21739,7 @@
                 <a:solidFill>
                   <a:srgbClr val="2D5016"/>
                 </a:solidFill>
-                <a:latin typeface="Arial"/>
+                <a:latin typeface="Arial" panose="020B0604020202020204"/>
               </a:defRPr>
             </a:pPr>
             <a:r>
@@ -21800,7 +21773,7 @@
                 <a:solidFill>
                   <a:srgbClr val="333333"/>
                 </a:solidFill>
-                <a:latin typeface="Arial"/>
+                <a:latin typeface="Arial" panose="020B0604020202020204"/>
               </a:defRPr>
             </a:pPr>
             <a:r>
@@ -21834,7 +21807,7 @@
                 <a:solidFill>
                   <a:srgbClr val="D4A017"/>
                 </a:solidFill>
-                <a:latin typeface="Arial"/>
+                <a:latin typeface="Arial" panose="020B0604020202020204"/>
               </a:defRPr>
             </a:pPr>
             <a:r>
@@ -21911,7 +21884,7 @@
                 <a:solidFill>
                   <a:srgbClr val="2D5016"/>
                 </a:solidFill>
-                <a:latin typeface="Arial"/>
+                <a:latin typeface="Arial" panose="020B0604020202020204"/>
               </a:defRPr>
             </a:pPr>
             <a:r>
@@ -21945,7 +21918,7 @@
                 <a:solidFill>
                   <a:srgbClr val="333333"/>
                 </a:solidFill>
-                <a:latin typeface="Arial"/>
+                <a:latin typeface="Arial" panose="020B0604020202020204"/>
               </a:defRPr>
             </a:pPr>
             <a:r>
@@ -21979,7 +21952,7 @@
                 <a:solidFill>
                   <a:srgbClr val="D4A017"/>
                 </a:solidFill>
-                <a:latin typeface="Arial"/>
+                <a:latin typeface="Arial" panose="020B0604020202020204"/>
               </a:defRPr>
             </a:pPr>
             <a:r>
@@ -22056,7 +22029,7 @@
                 <a:solidFill>
                   <a:srgbClr val="2D5016"/>
                 </a:solidFill>
-                <a:latin typeface="Arial"/>
+                <a:latin typeface="Arial" panose="020B0604020202020204"/>
               </a:defRPr>
             </a:pPr>
             <a:r>
@@ -22090,7 +22063,7 @@
                 <a:solidFill>
                   <a:srgbClr val="333333"/>
                 </a:solidFill>
-                <a:latin typeface="Arial"/>
+                <a:latin typeface="Arial" panose="020B0604020202020204"/>
               </a:defRPr>
             </a:pPr>
             <a:r>
@@ -22124,7 +22097,7 @@
                 <a:solidFill>
                   <a:srgbClr val="888888"/>
                 </a:solidFill>
-                <a:latin typeface="Arial"/>
+                <a:latin typeface="Arial" panose="020B0604020202020204"/>
               </a:defRPr>
             </a:pPr>
             <a:r>
@@ -22201,7 +22174,7 @@
                 <a:solidFill>
                   <a:srgbClr val="2D5016"/>
                 </a:solidFill>
-                <a:latin typeface="Arial"/>
+                <a:latin typeface="Arial" panose="020B0604020202020204"/>
               </a:defRPr>
             </a:pPr>
             <a:r>
@@ -22235,7 +22208,7 @@
                 <a:solidFill>
                   <a:srgbClr val="333333"/>
                 </a:solidFill>
-                <a:latin typeface="Arial"/>
+                <a:latin typeface="Arial" panose="020B0604020202020204"/>
               </a:defRPr>
             </a:pPr>
             <a:r>
@@ -22269,7 +22242,7 @@
                 <a:solidFill>
                   <a:srgbClr val="888888"/>
                 </a:solidFill>
-                <a:latin typeface="Arial"/>
+                <a:latin typeface="Arial" panose="020B0604020202020204"/>
               </a:defRPr>
             </a:pPr>
             <a:r>
@@ -22346,7 +22319,7 @@
                 <a:solidFill>
                   <a:srgbClr val="2D5016"/>
                 </a:solidFill>
-                <a:latin typeface="Arial"/>
+                <a:latin typeface="Arial" panose="020B0604020202020204"/>
               </a:defRPr>
             </a:pPr>
             <a:r>
@@ -22380,7 +22353,7 @@
                 <a:solidFill>
                   <a:srgbClr val="333333"/>
                 </a:solidFill>
-                <a:latin typeface="Arial"/>
+                <a:latin typeface="Arial" panose="020B0604020202020204"/>
               </a:defRPr>
             </a:pPr>
             <a:r>
@@ -22414,7 +22387,7 @@
                 <a:solidFill>
                   <a:srgbClr val="888888"/>
                 </a:solidFill>
-                <a:latin typeface="Arial"/>
+                <a:latin typeface="Arial" panose="020B0604020202020204"/>
               </a:defRPr>
             </a:pPr>
             <a:r>
@@ -22491,7 +22464,7 @@
                 <a:solidFill>
                   <a:srgbClr val="2D5016"/>
                 </a:solidFill>
-                <a:latin typeface="Arial"/>
+                <a:latin typeface="Arial" panose="020B0604020202020204"/>
               </a:defRPr>
             </a:pPr>
             <a:r>
@@ -22525,7 +22498,7 @@
                 <a:solidFill>
                   <a:srgbClr val="333333"/>
                 </a:solidFill>
-                <a:latin typeface="Arial"/>
+                <a:latin typeface="Arial" panose="020B0604020202020204"/>
               </a:defRPr>
             </a:pPr>
             <a:r>
@@ -22559,7 +22532,7 @@
                 <a:solidFill>
                   <a:srgbClr val="888888"/>
                 </a:solidFill>
-                <a:latin typeface="Arial"/>
+                <a:latin typeface="Arial" panose="020B0604020202020204"/>
               </a:defRPr>
             </a:pPr>
             <a:r>
@@ -22636,7 +22609,7 @@
                 <a:solidFill>
                   <a:srgbClr val="2D5016"/>
                 </a:solidFill>
-                <a:latin typeface="Arial"/>
+                <a:latin typeface="Arial" panose="020B0604020202020204"/>
               </a:defRPr>
             </a:pPr>
             <a:r>
@@ -22670,7 +22643,7 @@
                 <a:solidFill>
                   <a:srgbClr val="333333"/>
                 </a:solidFill>
-                <a:latin typeface="Arial"/>
+                <a:latin typeface="Arial" panose="020B0604020202020204"/>
               </a:defRPr>
             </a:pPr>
             <a:r>
@@ -22704,7 +22677,7 @@
                 <a:solidFill>
                   <a:srgbClr val="888888"/>
                 </a:solidFill>
-                <a:latin typeface="Arial"/>
+                <a:latin typeface="Arial" panose="020B0604020202020204"/>
               </a:defRPr>
             </a:pPr>
             <a:r>
@@ -22781,7 +22754,7 @@
                 <a:solidFill>
                   <a:srgbClr val="2D5016"/>
                 </a:solidFill>
-                <a:latin typeface="Arial"/>
+                <a:latin typeface="Arial" panose="020B0604020202020204"/>
               </a:defRPr>
             </a:pPr>
             <a:r>
@@ -22815,7 +22788,7 @@
                 <a:solidFill>
                   <a:srgbClr val="333333"/>
                 </a:solidFill>
-                <a:latin typeface="Arial"/>
+                <a:latin typeface="Arial" panose="020B0604020202020204"/>
               </a:defRPr>
             </a:pPr>
             <a:r>
@@ -22849,7 +22822,7 @@
                 <a:solidFill>
                   <a:srgbClr val="888888"/>
                 </a:solidFill>
-                <a:latin typeface="Arial"/>
+                <a:latin typeface="Arial" panose="020B0604020202020204"/>
               </a:defRPr>
             </a:pPr>
             <a:r>
@@ -22867,7 +22840,7 @@
 </file>
 
 <file path=ppt/slides/slide28.xml><?xml version="1.0" encoding="utf-8"?>
-<p:sld xmlns:a="http://schemas.openxmlformats.org/drawingml/2006/main" xmlns:p="http://schemas.openxmlformats.org/presentationml/2006/main" xmlns:r="http://schemas.openxmlformats.org/officeDocument/2006/relationships">
+<p:sld xmlns:a="http://schemas.openxmlformats.org/drawingml/2006/main" xmlns:r="http://schemas.openxmlformats.org/officeDocument/2006/relationships" xmlns:p="http://schemas.openxmlformats.org/presentationml/2006/main">
   <p:cSld>
     <p:bg>
       <p:bgPr>
@@ -22995,7 +22968,7 @@
                 <a:solidFill>
                   <a:srgbClr val="D4A017"/>
                 </a:solidFill>
-                <a:latin typeface="Arial"/>
+                <a:latin typeface="Arial" panose="020B0604020202020204"/>
               </a:defRPr>
             </a:pPr>
             <a:r>
@@ -23029,7 +23002,7 @@
                 <a:solidFill>
                   <a:srgbClr val="FFFFFF"/>
                 </a:solidFill>
-                <a:latin typeface="Arial"/>
+                <a:latin typeface="Arial" panose="020B0604020202020204"/>
               </a:defRPr>
             </a:pPr>
             <a:r>
@@ -23063,7 +23036,7 @@
                 <a:solidFill>
                   <a:srgbClr val="888888"/>
                 </a:solidFill>
-                <a:latin typeface="Arial"/>
+                <a:latin typeface="Arial" panose="020B0604020202020204"/>
               </a:defRPr>
             </a:pPr>
             <a:r>
@@ -23097,7 +23070,7 @@
                 <a:solidFill>
                   <a:srgbClr val="888888"/>
                 </a:solidFill>
-                <a:latin typeface="Arial"/>
+                <a:latin typeface="Arial" panose="020B0604020202020204"/>
               </a:defRPr>
             </a:pPr>
             <a:r>
@@ -23115,7 +23088,7 @@
 </file>
 
 <file path=ppt/slides/slide3.xml><?xml version="1.0" encoding="utf-8"?>
-<p:sld xmlns:a="http://schemas.openxmlformats.org/drawingml/2006/main" xmlns:p="http://schemas.openxmlformats.org/presentationml/2006/main" xmlns:r="http://schemas.openxmlformats.org/officeDocument/2006/relationships">
+<p:sld xmlns:a="http://schemas.openxmlformats.org/drawingml/2006/main" xmlns:r="http://schemas.openxmlformats.org/officeDocument/2006/relationships" xmlns:p="http://schemas.openxmlformats.org/presentationml/2006/main">
   <p:cSld>
     <p:bg>
       <p:bgPr>
@@ -23157,7 +23130,7 @@
                 <a:solidFill>
                   <a:srgbClr val="2D5016"/>
                 </a:solidFill>
-                <a:latin typeface="Arial"/>
+                <a:latin typeface="Arial" panose="020B0604020202020204"/>
               </a:defRPr>
             </a:pPr>
             <a:r>
@@ -23277,7 +23250,7 @@
                 <a:solidFill>
                   <a:srgbClr val="2D5016"/>
                 </a:solidFill>
-                <a:latin typeface="Arial"/>
+                <a:latin typeface="Arial" panose="020B0604020202020204"/>
               </a:defRPr>
             </a:pPr>
             <a:r>
@@ -23290,7 +23263,7 @@
                 <a:solidFill>
                   <a:srgbClr val="333333"/>
                 </a:solidFill>
-                <a:latin typeface="Arial"/>
+                <a:latin typeface="Arial" panose="020B0604020202020204"/>
               </a:defRPr>
             </a:pPr>
           </a:p>
@@ -23300,7 +23273,7 @@
                 <a:solidFill>
                   <a:srgbClr val="333333"/>
                 </a:solidFill>
-                <a:latin typeface="Arial"/>
+                <a:latin typeface="Arial" panose="020B0604020202020204"/>
               </a:defRPr>
             </a:pPr>
             <a:r>
@@ -23313,7 +23286,7 @@
                 <a:solidFill>
                   <a:srgbClr val="333333"/>
                 </a:solidFill>
-                <a:latin typeface="Arial"/>
+                <a:latin typeface="Arial" panose="020B0604020202020204"/>
               </a:defRPr>
             </a:pPr>
             <a:r>
@@ -23326,7 +23299,7 @@
                 <a:solidFill>
                   <a:srgbClr val="333333"/>
                 </a:solidFill>
-                <a:latin typeface="Arial"/>
+                <a:latin typeface="Arial" panose="020B0604020202020204"/>
               </a:defRPr>
             </a:pPr>
             <a:r>
@@ -23339,7 +23312,7 @@
                 <a:solidFill>
                   <a:srgbClr val="333333"/>
                 </a:solidFill>
-                <a:latin typeface="Arial"/>
+                <a:latin typeface="Arial" panose="020B0604020202020204"/>
               </a:defRPr>
             </a:pPr>
             <a:r>
@@ -23352,7 +23325,7 @@
                 <a:solidFill>
                   <a:srgbClr val="333333"/>
                 </a:solidFill>
-                <a:latin typeface="Arial"/>
+                <a:latin typeface="Arial" panose="020B0604020202020204"/>
               </a:defRPr>
             </a:pPr>
             <a:r>
@@ -23365,7 +23338,7 @@
                 <a:solidFill>
                   <a:srgbClr val="333333"/>
                 </a:solidFill>
-                <a:latin typeface="Arial"/>
+                <a:latin typeface="Arial" panose="020B0604020202020204"/>
               </a:defRPr>
             </a:pPr>
             <a:r>
@@ -23485,7 +23458,7 @@
                 <a:solidFill>
                   <a:srgbClr val="2D5016"/>
                 </a:solidFill>
-                <a:latin typeface="Arial"/>
+                <a:latin typeface="Arial" panose="020B0604020202020204"/>
               </a:defRPr>
             </a:pPr>
             <a:r>
@@ -23498,7 +23471,7 @@
                 <a:solidFill>
                   <a:srgbClr val="333333"/>
                 </a:solidFill>
-                <a:latin typeface="Arial"/>
+                <a:latin typeface="Arial" panose="020B0604020202020204"/>
               </a:defRPr>
             </a:pPr>
           </a:p>
@@ -23508,7 +23481,7 @@
                 <a:solidFill>
                   <a:srgbClr val="333333"/>
                 </a:solidFill>
-                <a:latin typeface="Arial"/>
+                <a:latin typeface="Arial" panose="020B0604020202020204"/>
               </a:defRPr>
             </a:pPr>
             <a:r>
@@ -23521,7 +23494,7 @@
                 <a:solidFill>
                   <a:srgbClr val="333333"/>
                 </a:solidFill>
-                <a:latin typeface="Arial"/>
+                <a:latin typeface="Arial" panose="020B0604020202020204"/>
               </a:defRPr>
             </a:pPr>
             <a:r>
@@ -23534,7 +23507,7 @@
                 <a:solidFill>
                   <a:srgbClr val="333333"/>
                 </a:solidFill>
-                <a:latin typeface="Arial"/>
+                <a:latin typeface="Arial" panose="020B0604020202020204"/>
               </a:defRPr>
             </a:pPr>
             <a:r>
@@ -23547,7 +23520,7 @@
                 <a:solidFill>
                   <a:srgbClr val="333333"/>
                 </a:solidFill>
-                <a:latin typeface="Arial"/>
+                <a:latin typeface="Arial" panose="020B0604020202020204"/>
               </a:defRPr>
             </a:pPr>
             <a:r>
@@ -23560,7 +23533,7 @@
                 <a:solidFill>
                   <a:srgbClr val="333333"/>
                 </a:solidFill>
-                <a:latin typeface="Arial"/>
+                <a:latin typeface="Arial" panose="020B0604020202020204"/>
               </a:defRPr>
             </a:pPr>
             <a:r>
@@ -23573,7 +23546,7 @@
                 <a:solidFill>
                   <a:srgbClr val="333333"/>
                 </a:solidFill>
-                <a:latin typeface="Arial"/>
+                <a:latin typeface="Arial" panose="020B0604020202020204"/>
               </a:defRPr>
             </a:pPr>
             <a:r>
@@ -23650,7 +23623,7 @@
                 <a:solidFill>
                   <a:srgbClr val="FFFFFF"/>
                 </a:solidFill>
-                <a:latin typeface="Arial"/>
+                <a:latin typeface="Arial" panose="020B0604020202020204"/>
               </a:defRPr>
             </a:pPr>
             <a:r>
@@ -23668,7 +23641,7 @@
 </file>
 
 <file path=ppt/slides/slide4.xml><?xml version="1.0" encoding="utf-8"?>
-<p:sld xmlns:a="http://schemas.openxmlformats.org/drawingml/2006/main" xmlns:p="http://schemas.openxmlformats.org/presentationml/2006/main" xmlns:r="http://schemas.openxmlformats.org/officeDocument/2006/relationships">
+<p:sld xmlns:a="http://schemas.openxmlformats.org/drawingml/2006/main" xmlns:r="http://schemas.openxmlformats.org/officeDocument/2006/relationships" xmlns:p="http://schemas.openxmlformats.org/presentationml/2006/main">
   <p:cSld>
     <p:bg>
       <p:bgPr>
@@ -23710,7 +23683,7 @@
                 <a:solidFill>
                   <a:srgbClr val="FFFFFF"/>
                 </a:solidFill>
-                <a:latin typeface="Arial"/>
+                <a:latin typeface="Arial" panose="020B0604020202020204"/>
               </a:defRPr>
             </a:pPr>
             <a:r>
@@ -23744,7 +23717,7 @@
                 <a:solidFill>
                   <a:srgbClr val="FFFFFF"/>
                 </a:solidFill>
-                <a:latin typeface="Arial"/>
+                <a:latin typeface="Arial" panose="020B0604020202020204"/>
               </a:defRPr>
             </a:pPr>
             <a:r>
@@ -23805,7 +23778,7 @@
 </file>
 
 <file path=ppt/slides/slide5.xml><?xml version="1.0" encoding="utf-8"?>
-<p:sld xmlns:a="http://schemas.openxmlformats.org/drawingml/2006/main" xmlns:p="http://schemas.openxmlformats.org/presentationml/2006/main" xmlns:r="http://schemas.openxmlformats.org/officeDocument/2006/relationships">
+<p:sld xmlns:a="http://schemas.openxmlformats.org/drawingml/2006/main" xmlns:r="http://schemas.openxmlformats.org/officeDocument/2006/relationships" xmlns:p="http://schemas.openxmlformats.org/presentationml/2006/main">
   <p:cSld>
     <p:bg>
       <p:bgPr>
@@ -23847,7 +23820,7 @@
                 <a:solidFill>
                   <a:srgbClr val="2D5016"/>
                 </a:solidFill>
-                <a:latin typeface="Arial"/>
+                <a:latin typeface="Arial" panose="020B0604020202020204"/>
               </a:defRPr>
             </a:pPr>
             <a:r>
@@ -23967,7 +23940,7 @@
                 <a:solidFill>
                   <a:srgbClr val="2D5016"/>
                 </a:solidFill>
-                <a:latin typeface="Arial"/>
+                <a:latin typeface="Arial" panose="020B0604020202020204"/>
               </a:defRPr>
             </a:pPr>
             <a:r>
@@ -23983,7 +23956,7 @@
                 <a:solidFill>
                   <a:srgbClr val="D4A017"/>
                 </a:solidFill>
-                <a:latin typeface="Arial"/>
+                <a:latin typeface="Arial" panose="020B0604020202020204"/>
               </a:defRPr>
             </a:pPr>
             <a:r>
@@ -23999,7 +23972,7 @@
                 <a:solidFill>
                   <a:srgbClr val="333333"/>
                 </a:solidFill>
-                <a:latin typeface="Arial"/>
+                <a:latin typeface="Arial" panose="020B0604020202020204"/>
               </a:defRPr>
             </a:pPr>
             <a:r>
@@ -24012,7 +23985,7 @@
                 <a:solidFill>
                   <a:srgbClr val="333333"/>
                 </a:solidFill>
-                <a:latin typeface="Arial"/>
+                <a:latin typeface="Arial" panose="020B0604020202020204"/>
               </a:defRPr>
             </a:pPr>
           </a:p>
@@ -24022,7 +23995,7 @@
                 <a:solidFill>
                   <a:srgbClr val="D4A017"/>
                 </a:solidFill>
-                <a:latin typeface="Arial"/>
+                <a:latin typeface="Arial" panose="020B0604020202020204"/>
               </a:defRPr>
             </a:pPr>
             <a:r>
@@ -24035,7 +24008,7 @@
                 <a:solidFill>
                   <a:srgbClr val="333333"/>
                 </a:solidFill>
-                <a:latin typeface="Arial"/>
+                <a:latin typeface="Arial" panose="020B0604020202020204"/>
               </a:defRPr>
             </a:pPr>
             <a:r>
@@ -24048,7 +24021,7 @@
                 <a:solidFill>
                   <a:srgbClr val="333333"/>
                 </a:solidFill>
-                <a:latin typeface="Arial"/>
+                <a:latin typeface="Arial" panose="020B0604020202020204"/>
               </a:defRPr>
             </a:pPr>
             <a:r>
@@ -24061,7 +24034,7 @@
                 <a:solidFill>
                   <a:srgbClr val="333333"/>
                 </a:solidFill>
-                <a:latin typeface="Arial"/>
+                <a:latin typeface="Arial" panose="020B0604020202020204"/>
               </a:defRPr>
             </a:pPr>
             <a:r>
@@ -24074,7 +24047,7 @@
                 <a:solidFill>
                   <a:srgbClr val="333333"/>
                 </a:solidFill>
-                <a:latin typeface="Arial"/>
+                <a:latin typeface="Arial" panose="020B0604020202020204"/>
               </a:defRPr>
             </a:pPr>
             <a:r>
@@ -24087,7 +24060,7 @@
                 <a:solidFill>
                   <a:srgbClr val="333333"/>
                 </a:solidFill>
-                <a:latin typeface="Arial"/>
+                <a:latin typeface="Arial" panose="020B0604020202020204"/>
               </a:defRPr>
             </a:pPr>
             <a:r>
@@ -24100,7 +24073,7 @@
                 <a:solidFill>
                   <a:srgbClr val="333333"/>
                 </a:solidFill>
-                <a:latin typeface="Arial"/>
+                <a:latin typeface="Arial" panose="020B0604020202020204"/>
               </a:defRPr>
             </a:pPr>
           </a:p>
@@ -24113,7 +24086,7 @@
                 <a:solidFill>
                   <a:srgbClr val="333333"/>
                 </a:solidFill>
-                <a:latin typeface="Arial"/>
+                <a:latin typeface="Arial" panose="020B0604020202020204"/>
               </a:defRPr>
             </a:pPr>
             <a:r>
@@ -24233,7 +24206,7 @@
                 <a:solidFill>
                   <a:srgbClr val="2D5016"/>
                 </a:solidFill>
-                <a:latin typeface="Arial"/>
+                <a:latin typeface="Arial" panose="020B0604020202020204"/>
               </a:defRPr>
             </a:pPr>
             <a:r>
@@ -24249,7 +24222,7 @@
                 <a:solidFill>
                   <a:srgbClr val="D4A017"/>
                 </a:solidFill>
-                <a:latin typeface="Arial"/>
+                <a:latin typeface="Arial" panose="020B0604020202020204"/>
               </a:defRPr>
             </a:pPr>
             <a:r>
@@ -24265,7 +24238,7 @@
                 <a:solidFill>
                   <a:srgbClr val="333333"/>
                 </a:solidFill>
-                <a:latin typeface="Arial"/>
+                <a:latin typeface="Arial" panose="020B0604020202020204"/>
               </a:defRPr>
             </a:pPr>
             <a:r>
@@ -24278,7 +24251,7 @@
                 <a:solidFill>
                   <a:srgbClr val="333333"/>
                 </a:solidFill>
-                <a:latin typeface="Arial"/>
+                <a:latin typeface="Arial" panose="020B0604020202020204"/>
               </a:defRPr>
             </a:pPr>
           </a:p>
@@ -24288,7 +24261,7 @@
                 <a:solidFill>
                   <a:srgbClr val="D4A017"/>
                 </a:solidFill>
-                <a:latin typeface="Arial"/>
+                <a:latin typeface="Arial" panose="020B0604020202020204"/>
               </a:defRPr>
             </a:pPr>
             <a:r>
@@ -24301,7 +24274,7 @@
                 <a:solidFill>
                   <a:srgbClr val="333333"/>
                 </a:solidFill>
-                <a:latin typeface="Arial"/>
+                <a:latin typeface="Arial" panose="020B0604020202020204"/>
               </a:defRPr>
             </a:pPr>
             <a:r>
@@ -24314,7 +24287,7 @@
                 <a:solidFill>
                   <a:srgbClr val="333333"/>
                 </a:solidFill>
-                <a:latin typeface="Arial"/>
+                <a:latin typeface="Arial" panose="020B0604020202020204"/>
               </a:defRPr>
             </a:pPr>
             <a:r>
@@ -24327,7 +24300,7 @@
                 <a:solidFill>
                   <a:srgbClr val="333333"/>
                 </a:solidFill>
-                <a:latin typeface="Arial"/>
+                <a:latin typeface="Arial" panose="020B0604020202020204"/>
               </a:defRPr>
             </a:pPr>
             <a:r>
@@ -24340,7 +24313,7 @@
                 <a:solidFill>
                   <a:srgbClr val="333333"/>
                 </a:solidFill>
-                <a:latin typeface="Arial"/>
+                <a:latin typeface="Arial" panose="020B0604020202020204"/>
               </a:defRPr>
             </a:pPr>
             <a:r>
@@ -24353,7 +24326,7 @@
                 <a:solidFill>
                   <a:srgbClr val="333333"/>
                 </a:solidFill>
-                <a:latin typeface="Arial"/>
+                <a:latin typeface="Arial" panose="020B0604020202020204"/>
               </a:defRPr>
             </a:pPr>
             <a:r>
@@ -24366,7 +24339,7 @@
                 <a:solidFill>
                   <a:srgbClr val="333333"/>
                 </a:solidFill>
-                <a:latin typeface="Arial"/>
+                <a:latin typeface="Arial" panose="020B0604020202020204"/>
               </a:defRPr>
             </a:pPr>
           </a:p>
@@ -24379,7 +24352,7 @@
                 <a:solidFill>
                   <a:srgbClr val="333333"/>
                 </a:solidFill>
-                <a:latin typeface="Arial"/>
+                <a:latin typeface="Arial" panose="020B0604020202020204"/>
               </a:defRPr>
             </a:pPr>
             <a:r>
@@ -24397,7 +24370,7 @@
 </file>
 
 <file path=ppt/slides/slide6.xml><?xml version="1.0" encoding="utf-8"?>
-<p:sld xmlns:a="http://schemas.openxmlformats.org/drawingml/2006/main" xmlns:p="http://schemas.openxmlformats.org/presentationml/2006/main" xmlns:r="http://schemas.openxmlformats.org/officeDocument/2006/relationships">
+<p:sld xmlns:a="http://schemas.openxmlformats.org/drawingml/2006/main" xmlns:r="http://schemas.openxmlformats.org/officeDocument/2006/relationships" xmlns:p="http://schemas.openxmlformats.org/presentationml/2006/main">
   <p:cSld>
     <p:bg>
       <p:bgPr>
@@ -24439,7 +24412,7 @@
                 <a:solidFill>
                   <a:srgbClr val="2D5016"/>
                 </a:solidFill>
-                <a:latin typeface="Arial"/>
+                <a:latin typeface="Arial" panose="020B0604020202020204"/>
               </a:defRPr>
             </a:pPr>
             <a:r>
@@ -24559,7 +24532,7 @@
                 <a:solidFill>
                   <a:srgbClr val="2D5016"/>
                 </a:solidFill>
-                <a:latin typeface="Arial"/>
+                <a:latin typeface="Arial" panose="020B0604020202020204"/>
               </a:defRPr>
             </a:pPr>
             <a:r>
@@ -24575,7 +24548,7 @@
                 <a:solidFill>
                   <a:srgbClr val="D4A017"/>
                 </a:solidFill>
-                <a:latin typeface="Arial"/>
+                <a:latin typeface="Arial" panose="020B0604020202020204"/>
               </a:defRPr>
             </a:pPr>
             <a:r>
@@ -24591,7 +24564,7 @@
                 <a:solidFill>
                   <a:srgbClr val="333333"/>
                 </a:solidFill>
-                <a:latin typeface="Arial"/>
+                <a:latin typeface="Arial" panose="020B0604020202020204"/>
               </a:defRPr>
             </a:pPr>
             <a:r>
@@ -24604,7 +24577,7 @@
                 <a:solidFill>
                   <a:srgbClr val="333333"/>
                 </a:solidFill>
-                <a:latin typeface="Arial"/>
+                <a:latin typeface="Arial" panose="020B0604020202020204"/>
               </a:defRPr>
             </a:pPr>
           </a:p>
@@ -24614,7 +24587,7 @@
                 <a:solidFill>
                   <a:srgbClr val="D4A017"/>
                 </a:solidFill>
-                <a:latin typeface="Arial"/>
+                <a:latin typeface="Arial" panose="020B0604020202020204"/>
               </a:defRPr>
             </a:pPr>
             <a:r>
@@ -24627,7 +24600,7 @@
                 <a:solidFill>
                   <a:srgbClr val="333333"/>
                 </a:solidFill>
-                <a:latin typeface="Arial"/>
+                <a:latin typeface="Arial" panose="020B0604020202020204"/>
               </a:defRPr>
             </a:pPr>
             <a:r>
@@ -24640,7 +24613,7 @@
                 <a:solidFill>
                   <a:srgbClr val="333333"/>
                 </a:solidFill>
-                <a:latin typeface="Arial"/>
+                <a:latin typeface="Arial" panose="020B0604020202020204"/>
               </a:defRPr>
             </a:pPr>
             <a:r>
@@ -24653,7 +24626,7 @@
                 <a:solidFill>
                   <a:srgbClr val="333333"/>
                 </a:solidFill>
-                <a:latin typeface="Arial"/>
+                <a:latin typeface="Arial" panose="020B0604020202020204"/>
               </a:defRPr>
             </a:pPr>
             <a:r>
@@ -24666,7 +24639,7 @@
                 <a:solidFill>
                   <a:srgbClr val="333333"/>
                 </a:solidFill>
-                <a:latin typeface="Arial"/>
+                <a:latin typeface="Arial" panose="020B0604020202020204"/>
               </a:defRPr>
             </a:pPr>
             <a:r>
@@ -24679,7 +24652,7 @@
                 <a:solidFill>
                   <a:srgbClr val="333333"/>
                 </a:solidFill>
-                <a:latin typeface="Arial"/>
+                <a:latin typeface="Arial" panose="020B0604020202020204"/>
               </a:defRPr>
             </a:pPr>
             <a:r>
@@ -24692,7 +24665,7 @@
                 <a:solidFill>
                   <a:srgbClr val="333333"/>
                 </a:solidFill>
-                <a:latin typeface="Arial"/>
+                <a:latin typeface="Arial" panose="020B0604020202020204"/>
               </a:defRPr>
             </a:pPr>
           </a:p>
@@ -24705,7 +24678,7 @@
                 <a:solidFill>
                   <a:srgbClr val="333333"/>
                 </a:solidFill>
-                <a:latin typeface="Arial"/>
+                <a:latin typeface="Arial" panose="020B0604020202020204"/>
               </a:defRPr>
             </a:pPr>
             <a:r>
@@ -24782,7 +24755,7 @@
                 <a:solidFill>
                   <a:srgbClr val="D4A017"/>
                 </a:solidFill>
-                <a:latin typeface="Arial"/>
+                <a:latin typeface="Arial" panose="020B0604020202020204"/>
               </a:defRPr>
             </a:pPr>
             <a:r>
@@ -24816,7 +24789,7 @@
                 <a:solidFill>
                   <a:srgbClr val="FFFFFF"/>
                 </a:solidFill>
-                <a:latin typeface="Arial"/>
+                <a:latin typeface="Arial" panose="020B0604020202020204"/>
               </a:defRPr>
             </a:pPr>
           </a:p>
@@ -24829,7 +24802,7 @@
                 <a:solidFill>
                   <a:srgbClr val="FFFFFF"/>
                 </a:solidFill>
-                <a:latin typeface="Arial"/>
+                <a:latin typeface="Arial" panose="020B0604020202020204"/>
               </a:defRPr>
             </a:pPr>
             <a:r>
@@ -24842,7 +24815,7 @@
                 <a:solidFill>
                   <a:srgbClr val="F5E6C8"/>
                 </a:solidFill>
-                <a:latin typeface="Arial"/>
+                <a:latin typeface="Arial" panose="020B0604020202020204"/>
               </a:defRPr>
             </a:pPr>
             <a:r>
@@ -24855,7 +24828,7 @@
                 <a:solidFill>
                   <a:srgbClr val="333333"/>
                 </a:solidFill>
-                <a:latin typeface="Arial"/>
+                <a:latin typeface="Arial" panose="020B0604020202020204"/>
               </a:defRPr>
             </a:pPr>
           </a:p>
@@ -24865,7 +24838,7 @@
                 <a:solidFill>
                   <a:srgbClr val="FFFFFF"/>
                 </a:solidFill>
-                <a:latin typeface="Arial"/>
+                <a:latin typeface="Arial" panose="020B0604020202020204"/>
               </a:defRPr>
             </a:pPr>
             <a:r>
@@ -24878,7 +24851,7 @@
                 <a:solidFill>
                   <a:srgbClr val="F5E6C8"/>
                 </a:solidFill>
-                <a:latin typeface="Arial"/>
+                <a:latin typeface="Arial" panose="020B0604020202020204"/>
               </a:defRPr>
             </a:pPr>
             <a:r>
@@ -24891,7 +24864,7 @@
                 <a:solidFill>
                   <a:srgbClr val="333333"/>
                 </a:solidFill>
-                <a:latin typeface="Arial"/>
+                <a:latin typeface="Arial" panose="020B0604020202020204"/>
               </a:defRPr>
             </a:pPr>
           </a:p>
@@ -24901,7 +24874,7 @@
                 <a:solidFill>
                   <a:srgbClr val="FFFFFF"/>
                 </a:solidFill>
-                <a:latin typeface="Arial"/>
+                <a:latin typeface="Arial" panose="020B0604020202020204"/>
               </a:defRPr>
             </a:pPr>
             <a:r>
@@ -24914,7 +24887,7 @@
                 <a:solidFill>
                   <a:srgbClr val="F5E6C8"/>
                 </a:solidFill>
-                <a:latin typeface="Arial"/>
+                <a:latin typeface="Arial" panose="020B0604020202020204"/>
               </a:defRPr>
             </a:pPr>
             <a:r>
@@ -24927,7 +24900,7 @@
                 <a:solidFill>
                   <a:srgbClr val="333333"/>
                 </a:solidFill>
-                <a:latin typeface="Arial"/>
+                <a:latin typeface="Arial" panose="020B0604020202020204"/>
               </a:defRPr>
             </a:pPr>
           </a:p>
@@ -24937,7 +24910,7 @@
                 <a:solidFill>
                   <a:srgbClr val="FFFFFF"/>
                 </a:solidFill>
-                <a:latin typeface="Arial"/>
+                <a:latin typeface="Arial" panose="020B0604020202020204"/>
               </a:defRPr>
             </a:pPr>
             <a:r>
@@ -24950,7 +24923,7 @@
                 <a:solidFill>
                   <a:srgbClr val="F5E6C8"/>
                 </a:solidFill>
-                <a:latin typeface="Arial"/>
+                <a:latin typeface="Arial" panose="020B0604020202020204"/>
               </a:defRPr>
             </a:pPr>
             <a:r>
@@ -24968,7 +24941,7 @@
 </file>
 
 <file path=ppt/slides/slide7.xml><?xml version="1.0" encoding="utf-8"?>
-<p:sld xmlns:a="http://schemas.openxmlformats.org/drawingml/2006/main" xmlns:p="http://schemas.openxmlformats.org/presentationml/2006/main" xmlns:r="http://schemas.openxmlformats.org/officeDocument/2006/relationships">
+<p:sld xmlns:a="http://schemas.openxmlformats.org/drawingml/2006/main" xmlns:r="http://schemas.openxmlformats.org/officeDocument/2006/relationships" xmlns:p="http://schemas.openxmlformats.org/presentationml/2006/main">
   <p:cSld>
     <p:bg>
       <p:bgPr>
@@ -25010,7 +24983,7 @@
                 <a:solidFill>
                   <a:srgbClr val="2D5016"/>
                 </a:solidFill>
-                <a:latin typeface="Arial"/>
+                <a:latin typeface="Arial" panose="020B0604020202020204"/>
               </a:defRPr>
             </a:pPr>
             <a:r>
@@ -25087,7 +25060,7 @@
                 <a:solidFill>
                   <a:srgbClr val="D4A017"/>
                 </a:solidFill>
-                <a:latin typeface="Arial"/>
+                <a:latin typeface="Arial" panose="020B0604020202020204"/>
               </a:defRPr>
             </a:pPr>
             <a:r>
@@ -25164,7 +25137,7 @@
                 <a:solidFill>
                   <a:srgbClr val="D4A017"/>
                 </a:solidFill>
-                <a:latin typeface="Arial"/>
+                <a:latin typeface="Arial" panose="020B0604020202020204"/>
               </a:defRPr>
             </a:pPr>
             <a:r>
@@ -25241,7 +25214,7 @@
                 <a:solidFill>
                   <a:srgbClr val="D4A017"/>
                 </a:solidFill>
-                <a:latin typeface="Arial"/>
+                <a:latin typeface="Arial" panose="020B0604020202020204"/>
               </a:defRPr>
             </a:pPr>
             <a:r>
@@ -25318,7 +25291,7 @@
                 <a:solidFill>
                   <a:srgbClr val="2D5016"/>
                 </a:solidFill>
-                <a:latin typeface="Arial"/>
+                <a:latin typeface="Arial" panose="020B0604020202020204"/>
               </a:defRPr>
             </a:pPr>
             <a:r>
@@ -25395,7 +25368,7 @@
                 <a:solidFill>
                   <a:srgbClr val="333333"/>
                 </a:solidFill>
-                <a:latin typeface="Arial"/>
+                <a:latin typeface="Arial" panose="020B0604020202020204"/>
               </a:defRPr>
             </a:pPr>
             <a:r>
@@ -25472,7 +25445,7 @@
                 <a:solidFill>
                   <a:srgbClr val="333333"/>
                 </a:solidFill>
-                <a:latin typeface="Arial"/>
+                <a:latin typeface="Arial" panose="020B0604020202020204"/>
               </a:defRPr>
             </a:pPr>
             <a:r>
@@ -25549,7 +25522,7 @@
                 <a:solidFill>
                   <a:srgbClr val="2D5016"/>
                 </a:solidFill>
-                <a:latin typeface="Arial"/>
+                <a:latin typeface="Arial" panose="020B0604020202020204"/>
               </a:defRPr>
             </a:pPr>
             <a:r>
@@ -25626,7 +25599,7 @@
                 <a:solidFill>
                   <a:srgbClr val="333333"/>
                 </a:solidFill>
-                <a:latin typeface="Arial"/>
+                <a:latin typeface="Arial" panose="020B0604020202020204"/>
               </a:defRPr>
             </a:pPr>
             <a:r>
@@ -25703,7 +25676,7 @@
                 <a:solidFill>
                   <a:srgbClr val="333333"/>
                 </a:solidFill>
-                <a:latin typeface="Arial"/>
+                <a:latin typeface="Arial" panose="020B0604020202020204"/>
               </a:defRPr>
             </a:pPr>
             <a:r>
@@ -25780,7 +25753,7 @@
                 <a:solidFill>
                   <a:srgbClr val="2D5016"/>
                 </a:solidFill>
-                <a:latin typeface="Arial"/>
+                <a:latin typeface="Arial" panose="020B0604020202020204"/>
               </a:defRPr>
             </a:pPr>
             <a:r>
@@ -25857,7 +25830,7 @@
                 <a:solidFill>
                   <a:srgbClr val="333333"/>
                 </a:solidFill>
-                <a:latin typeface="Arial"/>
+                <a:latin typeface="Arial" panose="020B0604020202020204"/>
               </a:defRPr>
             </a:pPr>
             <a:r>
@@ -25934,7 +25907,7 @@
                 <a:solidFill>
                   <a:srgbClr val="333333"/>
                 </a:solidFill>
-                <a:latin typeface="Arial"/>
+                <a:latin typeface="Arial" panose="020B0604020202020204"/>
               </a:defRPr>
             </a:pPr>
             <a:r>
@@ -26011,7 +25984,7 @@
                 <a:solidFill>
                   <a:srgbClr val="2D5016"/>
                 </a:solidFill>
-                <a:latin typeface="Arial"/>
+                <a:latin typeface="Arial" panose="020B0604020202020204"/>
               </a:defRPr>
             </a:pPr>
             <a:r>
@@ -26088,7 +26061,7 @@
                 <a:solidFill>
                   <a:srgbClr val="333333"/>
                 </a:solidFill>
-                <a:latin typeface="Arial"/>
+                <a:latin typeface="Arial" panose="020B0604020202020204"/>
               </a:defRPr>
             </a:pPr>
             <a:r>
@@ -26165,7 +26138,7 @@
                 <a:solidFill>
                   <a:srgbClr val="333333"/>
                 </a:solidFill>
-                <a:latin typeface="Arial"/>
+                <a:latin typeface="Arial" panose="020B0604020202020204"/>
               </a:defRPr>
             </a:pPr>
             <a:r>
@@ -26242,7 +26215,7 @@
                 <a:solidFill>
                   <a:srgbClr val="2D5016"/>
                 </a:solidFill>
-                <a:latin typeface="Arial"/>
+                <a:latin typeface="Arial" panose="020B0604020202020204"/>
               </a:defRPr>
             </a:pPr>
             <a:r>
@@ -26319,7 +26292,7 @@
                 <a:solidFill>
                   <a:srgbClr val="333333"/>
                 </a:solidFill>
-                <a:latin typeface="Arial"/>
+                <a:latin typeface="Arial" panose="020B0604020202020204"/>
               </a:defRPr>
             </a:pPr>
             <a:r>
@@ -26396,7 +26369,7 @@
                 <a:solidFill>
                   <a:srgbClr val="333333"/>
                 </a:solidFill>
-                <a:latin typeface="Arial"/>
+                <a:latin typeface="Arial" panose="020B0604020202020204"/>
               </a:defRPr>
             </a:pPr>
             <a:r>
@@ -26473,7 +26446,7 @@
                 <a:solidFill>
                   <a:srgbClr val="2D5016"/>
                 </a:solidFill>
-                <a:latin typeface="Arial"/>
+                <a:latin typeface="Arial" panose="020B0604020202020204"/>
               </a:defRPr>
             </a:pPr>
             <a:r>
@@ -26550,7 +26523,7 @@
                 <a:solidFill>
                   <a:srgbClr val="333333"/>
                 </a:solidFill>
-                <a:latin typeface="Arial"/>
+                <a:latin typeface="Arial" panose="020B0604020202020204"/>
               </a:defRPr>
             </a:pPr>
             <a:r>
@@ -26627,7 +26600,7 @@
                 <a:solidFill>
                   <a:srgbClr val="333333"/>
                 </a:solidFill>
-                <a:latin typeface="Arial"/>
+                <a:latin typeface="Arial" panose="020B0604020202020204"/>
               </a:defRPr>
             </a:pPr>
             <a:r>
@@ -26704,7 +26677,7 @@
                 <a:solidFill>
                   <a:srgbClr val="2D5016"/>
                 </a:solidFill>
-                <a:latin typeface="Arial"/>
+                <a:latin typeface="Arial" panose="020B0604020202020204"/>
               </a:defRPr>
             </a:pPr>
             <a:r>
@@ -26781,7 +26754,7 @@
                 <a:solidFill>
                   <a:srgbClr val="333333"/>
                 </a:solidFill>
-                <a:latin typeface="Arial"/>
+                <a:latin typeface="Arial" panose="020B0604020202020204"/>
               </a:defRPr>
             </a:pPr>
             <a:r>
@@ -26858,7 +26831,7 @@
                 <a:solidFill>
                   <a:srgbClr val="333333"/>
                 </a:solidFill>
-                <a:latin typeface="Arial"/>
+                <a:latin typeface="Arial" panose="020B0604020202020204"/>
               </a:defRPr>
             </a:pPr>
             <a:r>
@@ -26935,7 +26908,7 @@
                 <a:solidFill>
                   <a:srgbClr val="FFFFFF"/>
                 </a:solidFill>
-                <a:latin typeface="Arial"/>
+                <a:latin typeface="Arial" panose="020B0604020202020204"/>
               </a:defRPr>
             </a:pPr>
             <a:r>
@@ -26953,7 +26926,7 @@
 </file>
 
 <file path=ppt/slides/slide8.xml><?xml version="1.0" encoding="utf-8"?>
-<p:sld xmlns:a="http://schemas.openxmlformats.org/drawingml/2006/main" xmlns:p="http://schemas.openxmlformats.org/presentationml/2006/main" xmlns:r="http://schemas.openxmlformats.org/officeDocument/2006/relationships">
+<p:sld xmlns:a="http://schemas.openxmlformats.org/drawingml/2006/main" xmlns:r="http://schemas.openxmlformats.org/officeDocument/2006/relationships" xmlns:p="http://schemas.openxmlformats.org/presentationml/2006/main">
   <p:cSld>
     <p:bg>
       <p:bgPr>
@@ -26995,7 +26968,7 @@
                 <a:solidFill>
                   <a:srgbClr val="FFFFFF"/>
                 </a:solidFill>
-                <a:latin typeface="Arial"/>
+                <a:latin typeface="Arial" panose="020B0604020202020204"/>
               </a:defRPr>
             </a:pPr>
             <a:r>
@@ -27029,7 +27002,7 @@
                 <a:solidFill>
                   <a:srgbClr val="FFFFFF"/>
                 </a:solidFill>
-                <a:latin typeface="Arial"/>
+                <a:latin typeface="Arial" panose="020B0604020202020204"/>
               </a:defRPr>
             </a:pPr>
             <a:r>
@@ -27090,7 +27063,7 @@
 </file>
 
 <file path=ppt/slides/slide9.xml><?xml version="1.0" encoding="utf-8"?>
-<p:sld xmlns:a="http://schemas.openxmlformats.org/drawingml/2006/main" xmlns:p="http://schemas.openxmlformats.org/presentationml/2006/main" xmlns:r="http://schemas.openxmlformats.org/officeDocument/2006/relationships">
+<p:sld xmlns:a="http://schemas.openxmlformats.org/drawingml/2006/main" xmlns:r="http://schemas.openxmlformats.org/officeDocument/2006/relationships" xmlns:p="http://schemas.openxmlformats.org/presentationml/2006/main">
   <p:cSld>
     <p:bg>
       <p:bgPr>
@@ -27132,7 +27105,7 @@
                 <a:solidFill>
                   <a:srgbClr val="2D5016"/>
                 </a:solidFill>
-                <a:latin typeface="Arial"/>
+                <a:latin typeface="Arial" panose="020B0604020202020204"/>
               </a:defRPr>
             </a:pPr>
             <a:r>
@@ -27252,7 +27225,7 @@
                 <a:solidFill>
                   <a:srgbClr val="2D5016"/>
                 </a:solidFill>
-                <a:latin typeface="Arial"/>
+                <a:latin typeface="Arial" panose="020B0604020202020204"/>
               </a:defRPr>
             </a:pPr>
             <a:r>
@@ -27268,7 +27241,7 @@
                 <a:solidFill>
                   <a:srgbClr val="333333"/>
                 </a:solidFill>
-                <a:latin typeface="Arial"/>
+                <a:latin typeface="Arial" panose="020B0604020202020204"/>
               </a:defRPr>
             </a:pPr>
             <a:r>
@@ -27284,7 +27257,7 @@
                 <a:solidFill>
                   <a:srgbClr val="333333"/>
                 </a:solidFill>
-                <a:latin typeface="Arial"/>
+                <a:latin typeface="Arial" panose="020B0604020202020204"/>
               </a:defRPr>
             </a:pPr>
             <a:r>
@@ -27300,7 +27273,7 @@
                 <a:solidFill>
                   <a:srgbClr val="D4A017"/>
                 </a:solidFill>
-                <a:latin typeface="Arial"/>
+                <a:latin typeface="Arial" panose="020B0604020202020204"/>
               </a:defRPr>
             </a:pPr>
             <a:r>
@@ -27420,7 +27393,7 @@
                 <a:solidFill>
                   <a:srgbClr val="2D5016"/>
                 </a:solidFill>
-                <a:latin typeface="Arial"/>
+                <a:latin typeface="Arial" panose="020B0604020202020204"/>
               </a:defRPr>
             </a:pPr>
             <a:r>
@@ -27436,7 +27409,7 @@
                 <a:solidFill>
                   <a:srgbClr val="333333"/>
                 </a:solidFill>
-                <a:latin typeface="Arial"/>
+                <a:latin typeface="Arial" panose="020B0604020202020204"/>
               </a:defRPr>
             </a:pPr>
             <a:r>
@@ -27452,7 +27425,7 @@
                 <a:solidFill>
                   <a:srgbClr val="333333"/>
                 </a:solidFill>
-                <a:latin typeface="Arial"/>
+                <a:latin typeface="Arial" panose="020B0604020202020204"/>
               </a:defRPr>
             </a:pPr>
             <a:r>
@@ -27468,7 +27441,7 @@
                 <a:solidFill>
                   <a:srgbClr val="D4A017"/>
                 </a:solidFill>
-                <a:latin typeface="Arial"/>
+                <a:latin typeface="Arial" panose="020B0604020202020204"/>
               </a:defRPr>
             </a:pPr>
             <a:r>
@@ -27588,7 +27561,7 @@
                 <a:solidFill>
                   <a:srgbClr val="2D5016"/>
                 </a:solidFill>
-                <a:latin typeface="Arial"/>
+                <a:latin typeface="Arial" panose="020B0604020202020204"/>
               </a:defRPr>
             </a:pPr>
             <a:r>
@@ -27604,7 +27577,7 @@
                 <a:solidFill>
                   <a:srgbClr val="333333"/>
                 </a:solidFill>
-                <a:latin typeface="Arial"/>
+                <a:latin typeface="Arial" panose="020B0604020202020204"/>
               </a:defRPr>
             </a:pPr>
             <a:r>
@@ -27620,7 +27593,7 @@
                 <a:solidFill>
                   <a:srgbClr val="333333"/>
                 </a:solidFill>
-                <a:latin typeface="Arial"/>
+                <a:latin typeface="Arial" panose="020B0604020202020204"/>
               </a:defRPr>
             </a:pPr>
             <a:r>
@@ -27636,7 +27609,7 @@
                 <a:solidFill>
                   <a:srgbClr val="D4A017"/>
                 </a:solidFill>
-                <a:latin typeface="Arial"/>
+                <a:latin typeface="Arial" panose="020B0604020202020204"/>
               </a:defRPr>
             </a:pPr>
             <a:r>
@@ -27756,7 +27729,7 @@
                 <a:solidFill>
                   <a:srgbClr val="2D5016"/>
                 </a:solidFill>
-                <a:latin typeface="Arial"/>
+                <a:latin typeface="Arial" panose="020B0604020202020204"/>
               </a:defRPr>
             </a:pPr>
             <a:r>
@@ -27772,7 +27745,7 @@
                 <a:solidFill>
                   <a:srgbClr val="333333"/>
                 </a:solidFill>
-                <a:latin typeface="Arial"/>
+                <a:latin typeface="Arial" panose="020B0604020202020204"/>
               </a:defRPr>
             </a:pPr>
             <a:r>
@@ -27788,7 +27761,7 @@
                 <a:solidFill>
                   <a:srgbClr val="333333"/>
                 </a:solidFill>
-                <a:latin typeface="Arial"/>
+                <a:latin typeface="Arial" panose="020B0604020202020204"/>
               </a:defRPr>
             </a:pPr>
             <a:r>
@@ -27804,7 +27777,7 @@
                 <a:solidFill>
                   <a:srgbClr val="D4A017"/>
                 </a:solidFill>
-                <a:latin typeface="Arial"/>
+                <a:latin typeface="Arial" panose="020B0604020202020204"/>
               </a:defRPr>
             </a:pPr>
             <a:r>
@@ -27881,7 +27854,7 @@
                 <a:solidFill>
                   <a:srgbClr val="FFFFFF"/>
                 </a:solidFill>
-                <a:latin typeface="Arial"/>
+                <a:latin typeface="Arial" panose="020B0604020202020204"/>
               </a:defRPr>
             </a:pPr>
             <a:r>
@@ -28214,6 +28187,10 @@
       </a:style>
     </a:lnDef>
   </a:objectDefaults>
-  <a:extraClrSchemeLst/>
+  <a:extLst>
+    <a:ext uri="{05A4C25C-085E-4340-85A3-A5531E510DB2}">
+      <thm15:themeFamily xmlns:thm15="http://schemas.microsoft.com/office/thememl/2012/main" name="Office Theme" id="{62F939B6-93AF-4DB8-9C6B-D6C7DFDC589F}" vid="{4A3C46E8-61CC-4603-A589-7422A47A8E4A}"/>
+    </a:ext>
+  </a:extLst>
 </a:theme>
 </file>